--- a/soutenance/presentation_fusion.pptx
+++ b/soutenance/presentation_fusion.pptx
@@ -125,6 +125,14 @@
 </p:presentation>
 </file>
 
+<file path=ppt/revisionInfo.xml><?xml version="1.0" encoding="utf-8"?>
+<p1510:revInfo xmlns:a="http://schemas.openxmlformats.org/drawingml/2006/main" xmlns:r="http://schemas.openxmlformats.org/officeDocument/2006/relationships" xmlns:p1510="http://schemas.microsoft.com/office/powerpoint/2015/10/main">
+  <p1510:revLst>
+    <p1510:client id="{0A670903-C729-E12F-D5F2-EE588F6DDDE2}" v="1" dt="2026-10-15T16:20:48.401"/>
+  </p1510:revLst>
+</p1510:revInfo>
+</file>
+
 <file path=ppt/notesMasters/notesMaster1.xml><?xml version="1.0" encoding="utf-8"?>
 <p:notesMaster xmlns:a="http://schemas.openxmlformats.org/drawingml/2006/main" xmlns:r="http://schemas.openxmlformats.org/officeDocument/2006/relationships" xmlns:p="http://schemas.openxmlformats.org/presentationml/2006/main">
   <p:cSld>
@@ -206,7 +214,7 @@
           </a:lstStyle>
           <a:p>
             <a:fld id="{4FD55F9A-7859-46FE-8A5C-4C101A73E515}" type="datetimeFigureOut">
-              <a:t>11/10/2026</a:t>
+              <a:t>15/10/2026</a:t>
             </a:fld>
             <a:endParaRPr lang="fr-FR"/>
           </a:p>
@@ -518,8 +526,286 @@
           <a:p>
             <a:r>
               <a:rPr lang="en-US" dirty="0"/>
-              <a:t>Présentation : A (Imane). Objectif en une phrase : pour une ordonnance, détecter les associations à risque, les classer par gravité et expliquer chaque alerte, sans noyer le prescripteur. Préciser : prototype pédagogique, pas un dispositif médical.</a:t>
-            </a:r>
+              <a:t>Bonjour à </a:t>
+            </a:r>
+            <a:r>
+              <a:rPr lang="en-US" dirty="0" err="1"/>
+              <a:t>tous</a:t>
+            </a:r>
+            <a:r>
+              <a:rPr lang="en-US" dirty="0"/>
+              <a:t>. Avec Mohamed Aziz Braham, nous </a:t>
+            </a:r>
+            <a:r>
+              <a:rPr lang="en-US" dirty="0" err="1"/>
+              <a:t>allons</a:t>
+            </a:r>
+            <a:r>
+              <a:rPr lang="en-US" dirty="0"/>
+              <a:t> vous </a:t>
+            </a:r>
+            <a:r>
+              <a:rPr lang="en-US" dirty="0" err="1"/>
+              <a:t>présenter</a:t>
+            </a:r>
+            <a:r>
+              <a:rPr lang="en-US" dirty="0"/>
+              <a:t> </a:t>
+            </a:r>
+            <a:r>
+              <a:rPr lang="en-US" dirty="0" err="1"/>
+              <a:t>notre</a:t>
+            </a:r>
+            <a:r>
+              <a:rPr lang="en-US" dirty="0"/>
+              <a:t> mini-</a:t>
+            </a:r>
+            <a:r>
+              <a:rPr lang="en-US" dirty="0" err="1"/>
+              <a:t>projet</a:t>
+            </a:r>
+            <a:r>
+              <a:rPr lang="en-US" dirty="0"/>
+              <a:t> </a:t>
+            </a:r>
+            <a:r>
+              <a:rPr lang="en-US" dirty="0" err="1"/>
+              <a:t>d’intelligence</a:t>
+            </a:r>
+            <a:r>
+              <a:rPr lang="en-US" dirty="0"/>
+              <a:t> </a:t>
+            </a:r>
+            <a:r>
+              <a:rPr lang="en-US" dirty="0" err="1"/>
+              <a:t>artificielle</a:t>
+            </a:r>
+            <a:r>
+              <a:rPr lang="en-US" dirty="0"/>
+              <a:t> </a:t>
+            </a:r>
+            <a:r>
+              <a:rPr lang="en-US" dirty="0" err="1"/>
+              <a:t>hybride</a:t>
+            </a:r>
+            <a:r>
+              <a:rPr lang="en-US" dirty="0"/>
+              <a:t> : un </a:t>
+            </a:r>
+            <a:r>
+              <a:rPr lang="en-US" dirty="0" err="1"/>
+              <a:t>système</a:t>
+            </a:r>
+            <a:r>
+              <a:rPr lang="en-US" dirty="0"/>
+              <a:t> qui </a:t>
+            </a:r>
+            <a:r>
+              <a:rPr lang="en-US" dirty="0" err="1"/>
+              <a:t>vérifie</a:t>
+            </a:r>
+            <a:r>
+              <a:rPr lang="en-US" dirty="0"/>
+              <a:t> </a:t>
+            </a:r>
+            <a:r>
+              <a:rPr lang="en-US" dirty="0" err="1"/>
+              <a:t>une</a:t>
+            </a:r>
+            <a:r>
+              <a:rPr lang="en-US" dirty="0"/>
+              <a:t> ordonnance à </a:t>
+            </a:r>
+            <a:r>
+              <a:rPr lang="en-US" dirty="0" err="1"/>
+              <a:t>l’aide</a:t>
+            </a:r>
+            <a:r>
+              <a:rPr lang="en-US" dirty="0"/>
+              <a:t> d’un </a:t>
+            </a:r>
+            <a:r>
+              <a:rPr lang="en-US" dirty="0" err="1"/>
+              <a:t>graphe</a:t>
+            </a:r>
+            <a:r>
+              <a:rPr lang="en-US" dirty="0"/>
+              <a:t> de </a:t>
+            </a:r>
+            <a:r>
+              <a:rPr lang="en-US" dirty="0" err="1"/>
+              <a:t>connaissances</a:t>
+            </a:r>
+            <a:r>
+              <a:rPr lang="en-US" dirty="0"/>
+              <a:t> et de </a:t>
+            </a:r>
+            <a:r>
+              <a:rPr lang="en-US" dirty="0" err="1"/>
+              <a:t>règles</a:t>
+            </a:r>
+            <a:r>
+              <a:rPr lang="en-US" dirty="0"/>
+              <a:t> </a:t>
+            </a:r>
+            <a:r>
+              <a:rPr lang="en-US" dirty="0" err="1"/>
+              <a:t>médicales</a:t>
+            </a:r>
+            <a:r>
+              <a:rPr lang="en-US" dirty="0"/>
+              <a:t>.</a:t>
+            </a:r>
+            <a:br>
+              <a:rPr lang="en-US" dirty="0">
+                <a:cs typeface="+mn-lt"/>
+              </a:rPr>
+            </a:br>
+            <a:r>
+              <a:rPr lang="en-US" dirty="0" err="1"/>
+              <a:t>L’objectif</a:t>
+            </a:r>
+            <a:r>
+              <a:rPr lang="en-US" dirty="0"/>
+              <a:t> est simple : signaler les associations de </a:t>
+            </a:r>
+            <a:r>
+              <a:rPr lang="en-US" dirty="0" err="1"/>
+              <a:t>médicaments</a:t>
+            </a:r>
+            <a:r>
+              <a:rPr lang="en-US" dirty="0"/>
+              <a:t> à </a:t>
+            </a:r>
+            <a:r>
+              <a:rPr lang="en-US" dirty="0" err="1"/>
+              <a:t>risque</a:t>
+            </a:r>
+            <a:r>
+              <a:rPr lang="en-US" dirty="0"/>
+              <a:t>, les classer par </a:t>
+            </a:r>
+            <a:r>
+              <a:rPr lang="en-US" dirty="0" err="1"/>
+              <a:t>gravité</a:t>
+            </a:r>
+            <a:r>
+              <a:rPr lang="en-US" dirty="0"/>
+              <a:t>, et surtout </a:t>
+            </a:r>
+            <a:r>
+              <a:rPr lang="en-US" dirty="0" err="1"/>
+              <a:t>expliquer</a:t>
+            </a:r>
+            <a:r>
+              <a:rPr lang="en-US" dirty="0"/>
+              <a:t> </a:t>
+            </a:r>
+            <a:r>
+              <a:rPr lang="en-US" dirty="0" err="1"/>
+              <a:t>chaque</a:t>
+            </a:r>
+            <a:r>
+              <a:rPr lang="en-US" dirty="0"/>
+              <a:t> </a:t>
+            </a:r>
+            <a:r>
+              <a:rPr lang="en-US" dirty="0" err="1"/>
+              <a:t>alerte</a:t>
+            </a:r>
+            <a:r>
+              <a:rPr lang="en-US" dirty="0"/>
+              <a:t>.</a:t>
+            </a:r>
+            <a:br>
+              <a:rPr lang="en-US" dirty="0">
+                <a:cs typeface="+mn-lt"/>
+              </a:rPr>
+            </a:br>
+            <a:r>
+              <a:rPr lang="en-US" dirty="0" err="1"/>
+              <a:t>Précisons</a:t>
+            </a:r>
+            <a:r>
+              <a:rPr lang="en-US" dirty="0"/>
+              <a:t>-le </a:t>
+            </a:r>
+            <a:r>
+              <a:rPr lang="en-US" dirty="0" err="1"/>
+              <a:t>dès</a:t>
+            </a:r>
+            <a:r>
+              <a:rPr lang="en-US" dirty="0"/>
+              <a:t> le </a:t>
+            </a:r>
+            <a:r>
+              <a:rPr lang="en-US" dirty="0" err="1"/>
+              <a:t>départ</a:t>
+            </a:r>
+            <a:r>
+              <a:rPr lang="en-US" dirty="0"/>
+              <a:t> : </a:t>
+            </a:r>
+            <a:r>
+              <a:rPr lang="en-US" dirty="0" err="1"/>
+              <a:t>c’est</a:t>
+            </a:r>
+            <a:r>
+              <a:rPr lang="en-US" dirty="0"/>
+              <a:t> un prototype </a:t>
+            </a:r>
+            <a:r>
+              <a:rPr lang="en-US" dirty="0" err="1"/>
+              <a:t>pédagogique</a:t>
+            </a:r>
+            <a:r>
+              <a:rPr lang="en-US" dirty="0"/>
+              <a:t>, il ne </a:t>
+            </a:r>
+            <a:r>
+              <a:rPr lang="en-US" dirty="0" err="1"/>
+              <a:t>remplace</a:t>
+            </a:r>
+            <a:r>
+              <a:rPr lang="en-US" dirty="0"/>
+              <a:t> pas </a:t>
+            </a:r>
+            <a:r>
+              <a:rPr lang="en-US" dirty="0" err="1"/>
+              <a:t>l’avis</a:t>
+            </a:r>
+            <a:r>
+              <a:rPr lang="en-US" dirty="0"/>
+              <a:t> d’un </a:t>
+            </a:r>
+            <a:r>
+              <a:rPr lang="en-US" dirty="0" err="1"/>
+              <a:t>pharmacien</a:t>
+            </a:r>
+            <a:r>
+              <a:rPr lang="en-US" dirty="0"/>
+              <a:t> </a:t>
+            </a:r>
+            <a:r>
+              <a:rPr lang="en-US" dirty="0" err="1"/>
+              <a:t>ou</a:t>
+            </a:r>
+            <a:r>
+              <a:rPr lang="en-US" dirty="0"/>
+              <a:t> d’un </a:t>
+            </a:r>
+            <a:r>
+              <a:rPr lang="en-US" dirty="0" err="1"/>
+              <a:t>médecin</a:t>
+            </a:r>
+            <a:r>
+              <a:rPr lang="en-US" dirty="0"/>
+              <a:t>.</a:t>
+            </a:r>
+            <a:endParaRPr lang="fr-FR" dirty="0"/>
+          </a:p>
+          <a:p>
+            <a:endParaRPr lang="fr-FR"/>
           </a:p>
         </p:txBody>
       </p:sp>
@@ -952,9 +1238,235 @@
           <a:lstStyle/>
           <a:p>
             <a:r>
-              <a:rPr lang="en-US" dirty="0"/>
-              <a:t>A + B. Phrase de fin : l'approche hybride gagne parce que les deux sources de connaissance se complètent, et l'évaluation croisée nous a appris à nous méfier d'un jeu de test écrit par l'auteur des règles.</a:t>
-            </a:r>
+              <a:rPr lang="en-US" b="1" dirty="0"/>
+              <a:t>Début :</a:t>
+            </a:r>
+            <a:r>
+              <a:rPr lang="en-US" dirty="0"/>
+              <a:t> Pour </a:t>
+            </a:r>
+            <a:r>
+              <a:rPr lang="en-US" dirty="0" err="1"/>
+              <a:t>conclure</a:t>
+            </a:r>
+            <a:r>
+              <a:rPr lang="en-US" dirty="0"/>
+              <a:t>, </a:t>
+            </a:r>
+            <a:r>
+              <a:rPr lang="en-US" dirty="0" err="1"/>
+              <a:t>notre</a:t>
+            </a:r>
+            <a:r>
+              <a:rPr lang="en-US" dirty="0"/>
+              <a:t> apport principal est de combiner deux sources de </a:t>
+            </a:r>
+            <a:r>
+              <a:rPr lang="en-US" dirty="0" err="1"/>
+              <a:t>connaissance</a:t>
+            </a:r>
+            <a:r>
+              <a:rPr lang="en-US" dirty="0"/>
+              <a:t> : les </a:t>
+            </a:r>
+            <a:r>
+              <a:rPr lang="en-US" dirty="0" err="1"/>
+              <a:t>règles</a:t>
+            </a:r>
+            <a:r>
+              <a:rPr lang="en-US" dirty="0"/>
+              <a:t> </a:t>
+            </a:r>
+            <a:r>
+              <a:rPr lang="en-US" dirty="0" err="1"/>
+              <a:t>donnent</a:t>
+            </a:r>
+            <a:r>
+              <a:rPr lang="en-US" dirty="0"/>
+              <a:t> la </a:t>
+            </a:r>
+            <a:r>
+              <a:rPr lang="en-US" dirty="0" err="1"/>
+              <a:t>gravité</a:t>
+            </a:r>
+            <a:r>
+              <a:rPr lang="en-US" dirty="0"/>
+              <a:t> et la source, et le </a:t>
+            </a:r>
+            <a:r>
+              <a:rPr lang="en-US" dirty="0" err="1"/>
+              <a:t>graphe</a:t>
+            </a:r>
+            <a:r>
+              <a:rPr lang="en-US" dirty="0"/>
+              <a:t> </a:t>
+            </a:r>
+            <a:r>
+              <a:rPr lang="en-US" dirty="0" err="1"/>
+              <a:t>permet</a:t>
+            </a:r>
+            <a:r>
+              <a:rPr lang="en-US" dirty="0"/>
+              <a:t> de </a:t>
+            </a:r>
+            <a:r>
+              <a:rPr lang="en-US" dirty="0" err="1"/>
+              <a:t>généraliser</a:t>
+            </a:r>
+            <a:r>
+              <a:rPr lang="en-US" dirty="0"/>
+              <a:t> au-</a:t>
+            </a:r>
+            <a:r>
+              <a:rPr lang="en-US" dirty="0" err="1"/>
+              <a:t>delà</a:t>
+            </a:r>
+            <a:r>
+              <a:rPr lang="en-US" dirty="0"/>
+              <a:t> </a:t>
+            </a:r>
+            <a:r>
+              <a:rPr lang="en-US" dirty="0" err="1"/>
+              <a:t>d’une</a:t>
+            </a:r>
+            <a:r>
+              <a:rPr lang="en-US" dirty="0"/>
+              <a:t> simple </a:t>
+            </a:r>
+            <a:r>
+              <a:rPr lang="en-US" dirty="0" err="1"/>
+              <a:t>liste</a:t>
+            </a:r>
+            <a:r>
+              <a:rPr lang="en-US" dirty="0"/>
+              <a:t>.</a:t>
+            </a:r>
+            <a:br>
+              <a:rPr lang="en-US" dirty="0">
+                <a:cs typeface="+mn-lt"/>
+              </a:rPr>
+            </a:br>
+            <a:r>
+              <a:rPr lang="en-US" dirty="0"/>
+              <a:t>(Aziz </a:t>
+            </a:r>
+            <a:r>
+              <a:rPr lang="en-US" dirty="0" err="1"/>
+              <a:t>donne</a:t>
+            </a:r>
+            <a:r>
+              <a:rPr lang="en-US" dirty="0"/>
+              <a:t> les chiffres.)</a:t>
+            </a:r>
+            <a:br>
+              <a:rPr lang="en-US" dirty="0">
+                <a:cs typeface="+mn-lt"/>
+              </a:rPr>
+            </a:br>
+            <a:r>
+              <a:rPr lang="en-US" dirty="0"/>
+              <a:t>Fin : Nous </a:t>
+            </a:r>
+            <a:r>
+              <a:rPr lang="en-US" dirty="0" err="1"/>
+              <a:t>insistons</a:t>
+            </a:r>
+            <a:r>
+              <a:rPr lang="en-US" dirty="0"/>
+              <a:t> sur le fait </a:t>
+            </a:r>
+            <a:r>
+              <a:rPr lang="en-US" dirty="0" err="1"/>
+              <a:t>que</a:t>
+            </a:r>
+            <a:r>
+              <a:rPr lang="en-US" dirty="0"/>
+              <a:t> </a:t>
+            </a:r>
+            <a:r>
+              <a:rPr lang="en-US" dirty="0" err="1"/>
+              <a:t>c’est</a:t>
+            </a:r>
+            <a:r>
+              <a:rPr lang="en-US" dirty="0"/>
+              <a:t> un prototype </a:t>
+            </a:r>
+            <a:r>
+              <a:rPr lang="en-US" dirty="0" err="1"/>
+              <a:t>pédagogique</a:t>
+            </a:r>
+            <a:r>
+              <a:rPr lang="en-US" dirty="0"/>
+              <a:t> : </a:t>
+            </a:r>
+            <a:r>
+              <a:rPr lang="en-US" dirty="0" err="1"/>
+              <a:t>une</a:t>
+            </a:r>
+            <a:r>
+              <a:rPr lang="en-US" dirty="0"/>
+              <a:t> validation par un </a:t>
+            </a:r>
+            <a:r>
+              <a:rPr lang="en-US" dirty="0" err="1"/>
+              <a:t>professionnel</a:t>
+            </a:r>
+            <a:r>
+              <a:rPr lang="en-US" dirty="0"/>
+              <a:t> de santé </a:t>
+            </a:r>
+            <a:r>
+              <a:rPr lang="en-US" dirty="0" err="1"/>
+              <a:t>reste</a:t>
+            </a:r>
+            <a:r>
+              <a:rPr lang="en-US" dirty="0"/>
+              <a:t> indispensable. Merci pour </a:t>
+            </a:r>
+            <a:r>
+              <a:rPr lang="en-US" dirty="0" err="1"/>
+              <a:t>votre</a:t>
+            </a:r>
+            <a:r>
+              <a:rPr lang="en-US" dirty="0"/>
+              <a:t> attention, nous </a:t>
+            </a:r>
+            <a:r>
+              <a:rPr lang="en-US" dirty="0" err="1"/>
+              <a:t>sommes</a:t>
+            </a:r>
+            <a:r>
+              <a:rPr lang="en-US" dirty="0"/>
+              <a:t> </a:t>
+            </a:r>
+            <a:r>
+              <a:rPr lang="en-US" dirty="0" err="1"/>
+              <a:t>prêts</a:t>
+            </a:r>
+            <a:r>
+              <a:rPr lang="en-US" dirty="0"/>
+              <a:t> à </a:t>
+            </a:r>
+            <a:r>
+              <a:rPr lang="en-US" dirty="0" err="1"/>
+              <a:t>répondre</a:t>
+            </a:r>
+            <a:r>
+              <a:rPr lang="en-US" dirty="0"/>
+              <a:t> à </a:t>
+            </a:r>
+            <a:r>
+              <a:rPr lang="en-US" dirty="0" err="1"/>
+              <a:t>vos</a:t>
+            </a:r>
+            <a:r>
+              <a:rPr lang="en-US" dirty="0"/>
+              <a:t> questions.</a:t>
+            </a:r>
+            <a:endParaRPr lang="fr-FR" dirty="0"/>
+          </a:p>
+          <a:p>
+            <a:endParaRPr lang="fr-FR"/>
           </a:p>
         </p:txBody>
       </p:sp>
@@ -1040,8 +1552,415 @@
           <a:p>
             <a:r>
               <a:rPr lang="en-US" dirty="0"/>
-              <a:t>A (Imane). Trois objectifs : détecter, hiérarchiser, expliquer. Le piège classique des systèmes d'aide à la prescription est la fatigue d'alerte : on mesurera donc la précision et le nombre d'alertes par ordonnance, pas seulement le rappel.</a:t>
-            </a:r>
+              <a:t>Une ordonnance </a:t>
+            </a:r>
+            <a:r>
+              <a:rPr lang="en-US" dirty="0" err="1"/>
+              <a:t>contient</a:t>
+            </a:r>
+            <a:r>
+              <a:rPr lang="en-US" dirty="0"/>
+              <a:t> </a:t>
+            </a:r>
+            <a:r>
+              <a:rPr lang="en-US" dirty="0" err="1"/>
+              <a:t>souvent</a:t>
+            </a:r>
+            <a:r>
+              <a:rPr lang="en-US" dirty="0"/>
+              <a:t> </a:t>
+            </a:r>
+            <a:r>
+              <a:rPr lang="en-US" dirty="0" err="1"/>
+              <a:t>plusieurs</a:t>
+            </a:r>
+            <a:r>
+              <a:rPr lang="en-US" dirty="0"/>
+              <a:t> </a:t>
+            </a:r>
+            <a:r>
+              <a:rPr lang="en-US" dirty="0" err="1"/>
+              <a:t>médicaments</a:t>
+            </a:r>
+            <a:r>
+              <a:rPr lang="en-US" dirty="0"/>
+              <a:t>, et </a:t>
+            </a:r>
+            <a:r>
+              <a:rPr lang="en-US" dirty="0" err="1"/>
+              <a:t>certaines</a:t>
+            </a:r>
+            <a:r>
+              <a:rPr lang="en-US" dirty="0"/>
+              <a:t> associations </a:t>
+            </a:r>
+            <a:r>
+              <a:rPr lang="en-US" dirty="0" err="1"/>
+              <a:t>augmentent</a:t>
+            </a:r>
+            <a:r>
+              <a:rPr lang="en-US" dirty="0"/>
+              <a:t> des </a:t>
+            </a:r>
+            <a:r>
+              <a:rPr lang="en-US" dirty="0" err="1"/>
+              <a:t>risques</a:t>
+            </a:r>
+            <a:r>
+              <a:rPr lang="en-US" dirty="0"/>
+              <a:t> </a:t>
+            </a:r>
+            <a:r>
+              <a:rPr lang="en-US" dirty="0" err="1"/>
+              <a:t>comme</a:t>
+            </a:r>
+            <a:r>
+              <a:rPr lang="en-US" dirty="0"/>
+              <a:t> le </a:t>
+            </a:r>
+            <a:r>
+              <a:rPr lang="en-US" dirty="0" err="1"/>
+              <a:t>saignement</a:t>
+            </a:r>
+            <a:r>
+              <a:rPr lang="en-US" dirty="0"/>
+              <a:t>, </a:t>
+            </a:r>
+            <a:r>
+              <a:rPr lang="en-US" dirty="0" err="1"/>
+              <a:t>l’hyperkaliémie</a:t>
+            </a:r>
+            <a:r>
+              <a:rPr lang="en-US" dirty="0"/>
+              <a:t> </a:t>
+            </a:r>
+            <a:r>
+              <a:rPr lang="en-US" dirty="0" err="1"/>
+              <a:t>ou</a:t>
+            </a:r>
+            <a:r>
+              <a:rPr lang="en-US" dirty="0"/>
+              <a:t> la </a:t>
+            </a:r>
+            <a:r>
+              <a:rPr lang="en-US" dirty="0" err="1"/>
+              <a:t>toxicité</a:t>
+            </a:r>
+            <a:r>
+              <a:rPr lang="en-US" dirty="0"/>
+              <a:t>.</a:t>
+            </a:r>
+            <a:br>
+              <a:rPr lang="en-US" dirty="0">
+                <a:cs typeface="+mn-lt"/>
+              </a:rPr>
+            </a:br>
+            <a:r>
+              <a:rPr lang="en-US" dirty="0"/>
+              <a:t>Notre </a:t>
+            </a:r>
+            <a:r>
+              <a:rPr lang="en-US" dirty="0" err="1"/>
+              <a:t>système</a:t>
+            </a:r>
+            <a:r>
+              <a:rPr lang="en-US" dirty="0"/>
+              <a:t> doit </a:t>
+            </a:r>
+            <a:r>
+              <a:rPr lang="en-US" dirty="0" err="1"/>
+              <a:t>donc</a:t>
+            </a:r>
+            <a:r>
+              <a:rPr lang="en-US" dirty="0"/>
+              <a:t> faire trois choses : </a:t>
+            </a:r>
+            <a:r>
+              <a:rPr lang="en-US" dirty="0" err="1"/>
+              <a:t>détecter</a:t>
+            </a:r>
+            <a:r>
+              <a:rPr lang="en-US" dirty="0"/>
+              <a:t> </a:t>
+            </a:r>
+            <a:r>
+              <a:rPr lang="en-US" dirty="0" err="1"/>
+              <a:t>ces</a:t>
+            </a:r>
+            <a:r>
+              <a:rPr lang="en-US" dirty="0"/>
+              <a:t> associations, les </a:t>
+            </a:r>
+            <a:r>
+              <a:rPr lang="en-US" dirty="0" err="1"/>
+              <a:t>hiérarchiser</a:t>
+            </a:r>
+            <a:r>
+              <a:rPr lang="en-US" dirty="0"/>
+              <a:t> </a:t>
+            </a:r>
+            <a:r>
+              <a:rPr lang="en-US" dirty="0" err="1"/>
+              <a:t>selon</a:t>
+            </a:r>
+            <a:r>
+              <a:rPr lang="en-US" dirty="0"/>
+              <a:t> </a:t>
+            </a:r>
+            <a:r>
+              <a:rPr lang="en-US" dirty="0" err="1"/>
+              <a:t>l’échelle</a:t>
+            </a:r>
+            <a:r>
+              <a:rPr lang="en-US" dirty="0"/>
+              <a:t> de </a:t>
+            </a:r>
+            <a:r>
+              <a:rPr lang="en-US" dirty="0" err="1"/>
+              <a:t>gravité</a:t>
+            </a:r>
+            <a:r>
+              <a:rPr lang="en-US" dirty="0"/>
+              <a:t> de </a:t>
+            </a:r>
+            <a:r>
+              <a:rPr lang="en-US" dirty="0" err="1"/>
+              <a:t>l’ANSM</a:t>
+            </a:r>
+            <a:r>
+              <a:rPr lang="en-US" dirty="0"/>
+              <a:t>, de 1 à 4, et </a:t>
+            </a:r>
+            <a:r>
+              <a:rPr lang="en-US" dirty="0" err="1"/>
+              <a:t>expliquer</a:t>
+            </a:r>
+            <a:r>
+              <a:rPr lang="en-US" dirty="0"/>
+              <a:t> </a:t>
+            </a:r>
+            <a:r>
+              <a:rPr lang="en-US" dirty="0" err="1"/>
+              <a:t>chaque</a:t>
+            </a:r>
+            <a:r>
+              <a:rPr lang="en-US" dirty="0"/>
+              <a:t> </a:t>
+            </a:r>
+            <a:r>
+              <a:rPr lang="en-US" dirty="0" err="1"/>
+              <a:t>alerte</a:t>
+            </a:r>
+            <a:r>
+              <a:rPr lang="en-US" dirty="0"/>
+              <a:t> avec </a:t>
+            </a:r>
+            <a:r>
+              <a:rPr lang="en-US" dirty="0" err="1"/>
+              <a:t>sa</a:t>
+            </a:r>
+            <a:r>
+              <a:rPr lang="en-US" dirty="0"/>
+              <a:t> </a:t>
+            </a:r>
+            <a:r>
+              <a:rPr lang="en-US" dirty="0" err="1"/>
+              <a:t>règle</a:t>
+            </a:r>
+            <a:r>
+              <a:rPr lang="en-US" dirty="0"/>
+              <a:t>, </a:t>
+            </a:r>
+            <a:r>
+              <a:rPr lang="en-US" dirty="0" err="1"/>
+              <a:t>sa</a:t>
+            </a:r>
+            <a:r>
+              <a:rPr lang="en-US" dirty="0"/>
+              <a:t> source et </a:t>
+            </a:r>
+            <a:r>
+              <a:rPr lang="en-US" dirty="0" err="1"/>
+              <a:t>sa</a:t>
+            </a:r>
+            <a:r>
+              <a:rPr lang="en-US" dirty="0"/>
+              <a:t> </a:t>
+            </a:r>
+            <a:r>
+              <a:rPr lang="en-US" dirty="0" err="1"/>
+              <a:t>preuve</a:t>
+            </a:r>
+            <a:r>
+              <a:rPr lang="en-US" dirty="0"/>
+              <a:t>.</a:t>
+            </a:r>
+            <a:br>
+              <a:rPr lang="en-US" dirty="0">
+                <a:cs typeface="+mn-lt"/>
+              </a:rPr>
+            </a:br>
+            <a:r>
+              <a:rPr lang="en-US" dirty="0"/>
+              <a:t>La </a:t>
+            </a:r>
+            <a:r>
+              <a:rPr lang="en-US" dirty="0" err="1"/>
+              <a:t>difficulté</a:t>
+            </a:r>
+            <a:r>
+              <a:rPr lang="en-US" dirty="0"/>
+              <a:t>, </a:t>
+            </a:r>
+            <a:r>
+              <a:rPr lang="en-US" dirty="0" err="1"/>
+              <a:t>c’est</a:t>
+            </a:r>
+            <a:r>
+              <a:rPr lang="en-US" dirty="0"/>
+              <a:t> la fatigue </a:t>
+            </a:r>
+            <a:r>
+              <a:rPr lang="en-US" dirty="0" err="1"/>
+              <a:t>d’alerte</a:t>
+            </a:r>
+            <a:r>
+              <a:rPr lang="en-US" dirty="0"/>
+              <a:t> : </a:t>
+            </a:r>
+            <a:r>
+              <a:rPr lang="en-US" dirty="0" err="1"/>
+              <a:t>si</a:t>
+            </a:r>
+            <a:r>
+              <a:rPr lang="en-US" dirty="0"/>
+              <a:t> un </a:t>
+            </a:r>
+            <a:r>
+              <a:rPr lang="en-US" dirty="0" err="1"/>
+              <a:t>logiciel</a:t>
+            </a:r>
+            <a:r>
+              <a:rPr lang="en-US" dirty="0"/>
+              <a:t> </a:t>
+            </a:r>
+            <a:r>
+              <a:rPr lang="en-US" dirty="0" err="1"/>
+              <a:t>alerte</a:t>
+            </a:r>
+            <a:r>
+              <a:rPr lang="en-US" dirty="0"/>
+              <a:t> trop </a:t>
+            </a:r>
+            <a:r>
+              <a:rPr lang="en-US" dirty="0" err="1"/>
+              <a:t>souvent</a:t>
+            </a:r>
+            <a:r>
+              <a:rPr lang="en-US" dirty="0"/>
+              <a:t>, le </a:t>
+            </a:r>
+            <a:r>
+              <a:rPr lang="en-US" dirty="0" err="1"/>
+              <a:t>prescripteur</a:t>
+            </a:r>
+            <a:r>
+              <a:rPr lang="en-US" dirty="0"/>
+              <a:t> </a:t>
+            </a:r>
+            <a:r>
+              <a:rPr lang="en-US" dirty="0" err="1"/>
+              <a:t>finit</a:t>
+            </a:r>
+            <a:r>
+              <a:rPr lang="en-US" dirty="0"/>
+              <a:t> par ignorer </a:t>
+            </a:r>
+            <a:r>
+              <a:rPr lang="en-US" dirty="0" err="1"/>
+              <a:t>toutes</a:t>
+            </a:r>
+            <a:r>
+              <a:rPr lang="en-US" dirty="0"/>
+              <a:t> les </a:t>
+            </a:r>
+            <a:r>
+              <a:rPr lang="en-US" dirty="0" err="1"/>
+              <a:t>alertes</a:t>
+            </a:r>
+            <a:r>
+              <a:rPr lang="en-US" dirty="0"/>
+              <a:t>, </a:t>
+            </a:r>
+            <a:r>
+              <a:rPr lang="en-US" dirty="0" err="1"/>
+              <a:t>même</a:t>
+            </a:r>
+            <a:r>
+              <a:rPr lang="en-US" dirty="0"/>
+              <a:t> les plus graves.</a:t>
+            </a:r>
+            <a:br>
+              <a:rPr lang="en-US" dirty="0">
+                <a:cs typeface="+mn-lt"/>
+              </a:rPr>
+            </a:br>
+            <a:r>
+              <a:rPr lang="en-US" dirty="0"/>
+              <a:t>Pour </a:t>
+            </a:r>
+            <a:r>
+              <a:rPr lang="en-US" dirty="0" err="1"/>
+              <a:t>connaître</a:t>
+            </a:r>
+            <a:r>
+              <a:rPr lang="en-US" dirty="0"/>
+              <a:t> les </a:t>
+            </a:r>
+            <a:r>
+              <a:rPr lang="en-US" dirty="0" err="1"/>
+              <a:t>médicaments</a:t>
+            </a:r>
+            <a:r>
+              <a:rPr lang="en-US" dirty="0"/>
+              <a:t>, nous </a:t>
+            </a:r>
+            <a:r>
+              <a:rPr lang="en-US" dirty="0" err="1"/>
+              <a:t>nous</a:t>
+            </a:r>
+            <a:r>
+              <a:rPr lang="en-US" dirty="0"/>
+              <a:t> </a:t>
+            </a:r>
+            <a:r>
+              <a:rPr lang="en-US" dirty="0" err="1"/>
+              <a:t>sommes</a:t>
+            </a:r>
+            <a:r>
+              <a:rPr lang="en-US" dirty="0"/>
+              <a:t> </a:t>
+            </a:r>
+            <a:r>
+              <a:rPr lang="en-US" dirty="0" err="1"/>
+              <a:t>appuyés</a:t>
+            </a:r>
+            <a:r>
+              <a:rPr lang="en-US" dirty="0"/>
+              <a:t> sur </a:t>
+            </a:r>
+            <a:r>
+              <a:rPr lang="en-US" dirty="0" err="1"/>
+              <a:t>Hetionet</a:t>
+            </a:r>
+            <a:r>
+              <a:rPr lang="en-US" dirty="0"/>
+              <a:t>.</a:t>
+            </a:r>
+            <a:endParaRPr lang="fr-FR" dirty="0"/>
+          </a:p>
+          <a:p>
+            <a:endParaRPr lang="fr-FR"/>
           </a:p>
         </p:txBody>
       </p:sp>
@@ -1126,9 +2045,540 @@
           <a:lstStyle/>
           <a:p>
             <a:r>
-              <a:rPr lang="en-US" dirty="0"/>
-              <a:t>A (Imane). Sous-graphe : 4 types d'arêtes (classe, cible, effet indésirable, maladie). Message clé : une absence d'arête n'est pas une absence de risque. C'est pour ça qu'on ajoute une table ATC et des synonymes.</a:t>
-            </a:r>
+              <a:rPr lang="en-US" dirty="0" err="1"/>
+              <a:t>Hetionet</a:t>
+            </a:r>
+            <a:r>
+              <a:rPr lang="en-US" dirty="0"/>
+              <a:t> est un </a:t>
+            </a:r>
+            <a:r>
+              <a:rPr lang="en-US" dirty="0" err="1"/>
+              <a:t>graphe</a:t>
+            </a:r>
+            <a:r>
+              <a:rPr lang="en-US" dirty="0"/>
+              <a:t> </a:t>
+            </a:r>
+            <a:r>
+              <a:rPr lang="en-US" dirty="0" err="1"/>
+              <a:t>biomédical</a:t>
+            </a:r>
+            <a:r>
+              <a:rPr lang="en-US" dirty="0"/>
+              <a:t> public. Sur </a:t>
+            </a:r>
+            <a:r>
+              <a:rPr lang="en-US" dirty="0" err="1"/>
+              <a:t>ses</a:t>
+            </a:r>
+            <a:r>
+              <a:rPr lang="en-US" dirty="0"/>
+              <a:t> 47 031 </a:t>
+            </a:r>
+            <a:r>
+              <a:rPr lang="en-US" dirty="0" err="1"/>
+              <a:t>nœuds</a:t>
+            </a:r>
+            <a:r>
+              <a:rPr lang="en-US" dirty="0"/>
+              <a:t>, nous </a:t>
+            </a:r>
+            <a:r>
+              <a:rPr lang="en-US" dirty="0" err="1"/>
+              <a:t>avons</a:t>
+            </a:r>
+            <a:r>
+              <a:rPr lang="en-US" dirty="0"/>
+              <a:t> </a:t>
+            </a:r>
+            <a:r>
+              <a:rPr lang="en-US" dirty="0" err="1"/>
+              <a:t>gardé</a:t>
+            </a:r>
+            <a:r>
+              <a:rPr lang="en-US" dirty="0"/>
+              <a:t> les 9 364 </a:t>
+            </a:r>
+            <a:r>
+              <a:rPr lang="en-US" dirty="0" err="1"/>
+              <a:t>utiles</a:t>
+            </a:r>
+            <a:r>
+              <a:rPr lang="en-US" dirty="0"/>
+              <a:t> à </a:t>
+            </a:r>
+            <a:r>
+              <a:rPr lang="en-US" dirty="0" err="1"/>
+              <a:t>notre</a:t>
+            </a:r>
+            <a:r>
+              <a:rPr lang="en-US" dirty="0"/>
+              <a:t> </a:t>
+            </a:r>
+            <a:r>
+              <a:rPr lang="en-US" dirty="0" err="1"/>
+              <a:t>problème</a:t>
+            </a:r>
+            <a:r>
+              <a:rPr lang="en-US" dirty="0"/>
+              <a:t> : les </a:t>
+            </a:r>
+            <a:r>
+              <a:rPr lang="en-US" dirty="0" err="1"/>
+              <a:t>médicaments</a:t>
+            </a:r>
+            <a:r>
+              <a:rPr lang="en-US" dirty="0"/>
+              <a:t>, </a:t>
+            </a:r>
+            <a:r>
+              <a:rPr lang="en-US" dirty="0" err="1"/>
+              <a:t>leurs</a:t>
+            </a:r>
+            <a:r>
+              <a:rPr lang="en-US" dirty="0"/>
+              <a:t> classes </a:t>
+            </a:r>
+            <a:r>
+              <a:rPr lang="en-US" dirty="0" err="1"/>
+              <a:t>pharmacologiques</a:t>
+            </a:r>
+            <a:r>
+              <a:rPr lang="en-US" dirty="0"/>
+              <a:t>, </a:t>
+            </a:r>
+            <a:r>
+              <a:rPr lang="en-US" dirty="0" err="1"/>
+              <a:t>leurs</a:t>
+            </a:r>
+            <a:r>
+              <a:rPr lang="en-US" dirty="0"/>
+              <a:t> </a:t>
+            </a:r>
+            <a:r>
+              <a:rPr lang="en-US" dirty="0" err="1"/>
+              <a:t>cibles</a:t>
+            </a:r>
+            <a:r>
+              <a:rPr lang="en-US" dirty="0"/>
+              <a:t> et </a:t>
+            </a:r>
+            <a:r>
+              <a:rPr lang="en-US" dirty="0" err="1"/>
+              <a:t>leurs</a:t>
+            </a:r>
+            <a:r>
+              <a:rPr lang="en-US" dirty="0"/>
+              <a:t> </a:t>
+            </a:r>
+            <a:r>
+              <a:rPr lang="en-US" dirty="0" err="1"/>
+              <a:t>effets</a:t>
+            </a:r>
+            <a:r>
+              <a:rPr lang="en-US" dirty="0"/>
+              <a:t> </a:t>
+            </a:r>
+            <a:r>
+              <a:rPr lang="en-US" dirty="0" err="1"/>
+              <a:t>indésirables</a:t>
+            </a:r>
+            <a:r>
+              <a:rPr lang="en-US" dirty="0"/>
+              <a:t>.</a:t>
+            </a:r>
+            <a:br>
+              <a:rPr lang="en-US" dirty="0">
+                <a:cs typeface="+mn-lt"/>
+              </a:rPr>
+            </a:br>
+            <a:r>
+              <a:rPr lang="en-US" dirty="0"/>
+              <a:t>Mais </a:t>
+            </a:r>
+            <a:r>
+              <a:rPr lang="en-US" dirty="0" err="1"/>
+              <a:t>ce</a:t>
+            </a:r>
+            <a:r>
+              <a:rPr lang="en-US" dirty="0"/>
+              <a:t> </a:t>
+            </a:r>
+            <a:r>
+              <a:rPr lang="en-US" dirty="0" err="1"/>
+              <a:t>graphe</a:t>
+            </a:r>
+            <a:r>
+              <a:rPr lang="en-US" dirty="0"/>
+              <a:t> est </a:t>
+            </a:r>
+            <a:r>
+              <a:rPr lang="en-US" dirty="0" err="1"/>
+              <a:t>incomplet</a:t>
+            </a:r>
+            <a:r>
+              <a:rPr lang="en-US" dirty="0"/>
+              <a:t> pour </a:t>
+            </a:r>
+            <a:r>
+              <a:rPr lang="en-US" dirty="0" err="1"/>
+              <a:t>notre</a:t>
+            </a:r>
+            <a:r>
+              <a:rPr lang="en-US" dirty="0"/>
+              <a:t> usage. </a:t>
+            </a:r>
+            <a:r>
+              <a:rPr lang="en-US" dirty="0" err="1"/>
+              <a:t>Seulement</a:t>
+            </a:r>
+            <a:r>
+              <a:rPr lang="en-US" dirty="0"/>
+              <a:t> 47 % des </a:t>
+            </a:r>
+            <a:r>
+              <a:rPr lang="en-US" dirty="0" err="1"/>
+              <a:t>médicaments</a:t>
+            </a:r>
+            <a:r>
+              <a:rPr lang="en-US" dirty="0"/>
+              <a:t> y </a:t>
+            </a:r>
+            <a:r>
+              <a:rPr lang="en-US" dirty="0" err="1"/>
+              <a:t>ont</a:t>
+            </a:r>
+            <a:r>
+              <a:rPr lang="en-US" dirty="0"/>
+              <a:t> </a:t>
+            </a:r>
+            <a:r>
+              <a:rPr lang="en-US" dirty="0" err="1"/>
+              <a:t>une</a:t>
+            </a:r>
+            <a:r>
+              <a:rPr lang="en-US" dirty="0"/>
+              <a:t> </a:t>
+            </a:r>
+            <a:r>
+              <a:rPr lang="en-US" dirty="0" err="1"/>
+              <a:t>classe</a:t>
+            </a:r>
+            <a:r>
+              <a:rPr lang="en-US" dirty="0"/>
+              <a:t> : les </a:t>
+            </a:r>
+            <a:r>
+              <a:rPr lang="en-US" dirty="0" err="1"/>
+              <a:t>statines</a:t>
+            </a:r>
+            <a:r>
+              <a:rPr lang="en-US" dirty="0"/>
+              <a:t>, les IEC </a:t>
+            </a:r>
+            <a:r>
+              <a:rPr lang="en-US" dirty="0" err="1"/>
+              <a:t>ou</a:t>
+            </a:r>
+            <a:r>
+              <a:rPr lang="en-US" dirty="0"/>
+              <a:t> le potassium </a:t>
+            </a:r>
+            <a:r>
+              <a:rPr lang="en-US" dirty="0" err="1"/>
+              <a:t>n’en</a:t>
+            </a:r>
+            <a:r>
+              <a:rPr lang="en-US" dirty="0"/>
+              <a:t> </a:t>
+            </a:r>
+            <a:r>
+              <a:rPr lang="en-US" dirty="0" err="1"/>
+              <a:t>ont</a:t>
+            </a:r>
+            <a:r>
+              <a:rPr lang="en-US" dirty="0"/>
+              <a:t> pas. Et la </a:t>
+            </a:r>
+            <a:r>
+              <a:rPr lang="en-US" dirty="0" err="1"/>
+              <a:t>warfarine</a:t>
+            </a:r>
+            <a:r>
+              <a:rPr lang="en-US" dirty="0"/>
+              <a:t>, un anticoagulant très à </a:t>
+            </a:r>
+            <a:r>
+              <a:rPr lang="en-US" dirty="0" err="1"/>
+              <a:t>risque</a:t>
+            </a:r>
+            <a:r>
+              <a:rPr lang="en-US" dirty="0"/>
+              <a:t>, </a:t>
+            </a:r>
+            <a:r>
+              <a:rPr lang="en-US" dirty="0" err="1"/>
+              <a:t>n’a</a:t>
+            </a:r>
+            <a:r>
+              <a:rPr lang="en-US" dirty="0"/>
+              <a:t> </a:t>
+            </a:r>
+            <a:r>
+              <a:rPr lang="en-US" dirty="0" err="1"/>
+              <a:t>aucun</a:t>
+            </a:r>
+            <a:r>
+              <a:rPr lang="en-US" dirty="0"/>
+              <a:t> </a:t>
+            </a:r>
+            <a:r>
+              <a:rPr lang="en-US" dirty="0" err="1"/>
+              <a:t>effet</a:t>
+            </a:r>
+            <a:r>
+              <a:rPr lang="en-US" dirty="0"/>
+              <a:t> </a:t>
+            </a:r>
+            <a:r>
+              <a:rPr lang="en-US" dirty="0" err="1"/>
+              <a:t>indésirable</a:t>
+            </a:r>
+            <a:r>
+              <a:rPr lang="en-US" dirty="0"/>
+              <a:t> dans le </a:t>
+            </a:r>
+            <a:r>
+              <a:rPr lang="en-US" dirty="0" err="1"/>
+              <a:t>graphe</a:t>
+            </a:r>
+            <a:r>
+              <a:rPr lang="en-US" dirty="0"/>
+              <a:t>.</a:t>
+            </a:r>
+            <a:br>
+              <a:rPr lang="en-US" dirty="0">
+                <a:cs typeface="+mn-lt"/>
+              </a:rPr>
+            </a:br>
+            <a:r>
+              <a:rPr lang="en-US" dirty="0"/>
+              <a:t>Nous </a:t>
+            </a:r>
+            <a:r>
+              <a:rPr lang="en-US" dirty="0" err="1"/>
+              <a:t>avons</a:t>
+            </a:r>
+            <a:r>
+              <a:rPr lang="en-US" dirty="0"/>
+              <a:t> </a:t>
+            </a:r>
+            <a:r>
+              <a:rPr lang="en-US" dirty="0" err="1"/>
+              <a:t>donc</a:t>
+            </a:r>
+            <a:r>
+              <a:rPr lang="en-US" dirty="0"/>
+              <a:t> </a:t>
+            </a:r>
+            <a:r>
+              <a:rPr lang="en-US" dirty="0" err="1"/>
+              <a:t>ajouté</a:t>
+            </a:r>
+            <a:r>
+              <a:rPr lang="en-US" dirty="0"/>
+              <a:t> </a:t>
+            </a:r>
+            <a:r>
+              <a:rPr lang="en-US" dirty="0" err="1"/>
+              <a:t>nos</a:t>
+            </a:r>
+            <a:r>
+              <a:rPr lang="en-US" dirty="0"/>
+              <a:t> </a:t>
+            </a:r>
+            <a:r>
+              <a:rPr lang="en-US" dirty="0" err="1"/>
+              <a:t>propres</a:t>
+            </a:r>
+            <a:r>
+              <a:rPr lang="en-US" dirty="0"/>
+              <a:t> </a:t>
+            </a:r>
+            <a:r>
+              <a:rPr lang="en-US" dirty="0" err="1"/>
+              <a:t>connaissances</a:t>
+            </a:r>
+            <a:r>
+              <a:rPr lang="en-US" dirty="0"/>
+              <a:t>, </a:t>
+            </a:r>
+            <a:r>
+              <a:rPr lang="en-US" dirty="0" err="1"/>
+              <a:t>toutes</a:t>
+            </a:r>
+            <a:r>
+              <a:rPr lang="en-US" dirty="0"/>
+              <a:t> </a:t>
+            </a:r>
+            <a:r>
+              <a:rPr lang="en-US" dirty="0" err="1"/>
+              <a:t>sourcées</a:t>
+            </a:r>
+            <a:r>
+              <a:rPr lang="en-US" dirty="0"/>
+              <a:t> : </a:t>
+            </a:r>
+            <a:r>
+              <a:rPr lang="en-US" dirty="0" err="1"/>
+              <a:t>une</a:t>
+            </a:r>
+            <a:r>
+              <a:rPr lang="en-US" dirty="0"/>
+              <a:t> table de 28 classes issue de la classification ATC de </a:t>
+            </a:r>
+            <a:r>
+              <a:rPr lang="en-US" dirty="0" err="1"/>
+              <a:t>l’OMS</a:t>
+            </a:r>
+            <a:r>
+              <a:rPr lang="en-US" dirty="0"/>
+              <a:t>, un </a:t>
+            </a:r>
+            <a:r>
+              <a:rPr lang="en-US" dirty="0" err="1"/>
+              <a:t>dictionnaire</a:t>
+            </a:r>
+            <a:r>
+              <a:rPr lang="en-US" dirty="0"/>
+              <a:t> de </a:t>
+            </a:r>
+            <a:r>
+              <a:rPr lang="en-US" dirty="0" err="1"/>
+              <a:t>synonymes</a:t>
+            </a:r>
+            <a:r>
+              <a:rPr lang="en-US" dirty="0"/>
+              <a:t> pour les noms français et </a:t>
+            </a:r>
+            <a:r>
+              <a:rPr lang="en-US" dirty="0" err="1"/>
+              <a:t>commerciaux</a:t>
+            </a:r>
+            <a:r>
+              <a:rPr lang="en-US" dirty="0"/>
+              <a:t>, </a:t>
+            </a:r>
+            <a:r>
+              <a:rPr lang="en-US" dirty="0" err="1"/>
+              <a:t>une</a:t>
+            </a:r>
+            <a:r>
+              <a:rPr lang="en-US" dirty="0"/>
+              <a:t> </a:t>
+            </a:r>
+            <a:r>
+              <a:rPr lang="en-US" dirty="0" err="1"/>
+              <a:t>liste</a:t>
+            </a:r>
+            <a:r>
+              <a:rPr lang="en-US" dirty="0"/>
+              <a:t> de 17 </a:t>
+            </a:r>
+            <a:r>
+              <a:rPr lang="en-US" dirty="0" err="1"/>
+              <a:t>effets</a:t>
+            </a:r>
+            <a:r>
+              <a:rPr lang="en-US" dirty="0"/>
+              <a:t> graves et 14 </a:t>
+            </a:r>
+            <a:r>
+              <a:rPr lang="en-US" dirty="0" err="1"/>
+              <a:t>médicaments</a:t>
+            </a:r>
+            <a:r>
+              <a:rPr lang="en-US" dirty="0"/>
+              <a:t> à marge </a:t>
+            </a:r>
+            <a:r>
+              <a:rPr lang="en-US" dirty="0" err="1"/>
+              <a:t>thérapeutique</a:t>
+            </a:r>
+            <a:r>
+              <a:rPr lang="en-US" dirty="0"/>
+              <a:t> </a:t>
+            </a:r>
+            <a:r>
+              <a:rPr lang="en-US" dirty="0" err="1"/>
+              <a:t>étroite</a:t>
+            </a:r>
+            <a:r>
+              <a:rPr lang="en-US" dirty="0"/>
+              <a:t>.</a:t>
+            </a:r>
+            <a:br>
+              <a:rPr lang="en-US" dirty="0">
+                <a:cs typeface="+mn-lt"/>
+              </a:rPr>
+            </a:br>
+            <a:r>
+              <a:rPr lang="en-US" dirty="0"/>
+              <a:t>Le message </a:t>
+            </a:r>
+            <a:r>
+              <a:rPr lang="en-US" dirty="0" err="1"/>
+              <a:t>clé</a:t>
+            </a:r>
+            <a:r>
+              <a:rPr lang="en-US" dirty="0"/>
+              <a:t> : dans un </a:t>
+            </a:r>
+            <a:r>
+              <a:rPr lang="en-US" dirty="0" err="1"/>
+              <a:t>graphe</a:t>
+            </a:r>
+            <a:r>
+              <a:rPr lang="en-US" dirty="0"/>
+              <a:t>, </a:t>
+            </a:r>
+            <a:r>
+              <a:rPr lang="en-US" dirty="0" err="1"/>
+              <a:t>l’absence</a:t>
+            </a:r>
+            <a:r>
+              <a:rPr lang="en-US" dirty="0"/>
+              <a:t> d’un lien ne </a:t>
+            </a:r>
+            <a:r>
+              <a:rPr lang="en-US" dirty="0" err="1"/>
+              <a:t>veut</a:t>
+            </a:r>
+            <a:r>
+              <a:rPr lang="en-US" dirty="0"/>
+              <a:t> pas dire </a:t>
+            </a:r>
+            <a:r>
+              <a:rPr lang="en-US" dirty="0" err="1"/>
+              <a:t>l’absence</a:t>
+            </a:r>
+            <a:r>
+              <a:rPr lang="en-US" dirty="0"/>
+              <a:t> de </a:t>
+            </a:r>
+            <a:r>
+              <a:rPr lang="en-US" dirty="0" err="1"/>
+              <a:t>risque</a:t>
+            </a:r>
+            <a:r>
+              <a:rPr lang="en-US" dirty="0"/>
+              <a:t>.</a:t>
+            </a:r>
+            <a:endParaRPr lang="fr-FR" dirty="0"/>
+          </a:p>
+          <a:p>
+            <a:endParaRPr lang="fr-FR"/>
           </a:p>
         </p:txBody>
       </p:sp>
@@ -1213,9 +2663,453 @@
           <a:lstStyle/>
           <a:p>
             <a:r>
-              <a:rPr lang="en-US" dirty="0"/>
-              <a:t>A (Imane). Le flux : on reconnaît les noms (français, commerciaux, fautes de frappe signalées), on forme toutes les paires, on applique deux familles de règles, puis le filtre anti-fatigue. Un médicament inconnu est toujours signalé, jamais ignoré en silence.</a:t>
-            </a:r>
+              <a:rPr lang="en-US" dirty="0" err="1"/>
+              <a:t>Voici</a:t>
+            </a:r>
+            <a:r>
+              <a:rPr lang="en-US" dirty="0"/>
+              <a:t> le </a:t>
+            </a:r>
+            <a:r>
+              <a:rPr lang="en-US" dirty="0" err="1"/>
+              <a:t>fonctionnement</a:t>
+            </a:r>
+            <a:r>
+              <a:rPr lang="en-US" dirty="0"/>
+              <a:t> du </a:t>
+            </a:r>
+            <a:r>
+              <a:rPr lang="en-US" dirty="0" err="1"/>
+              <a:t>système</a:t>
+            </a:r>
+            <a:r>
+              <a:rPr lang="en-US" dirty="0"/>
+              <a:t>.</a:t>
+            </a:r>
+            <a:br>
+              <a:rPr lang="en-US" dirty="0">
+                <a:cs typeface="+mn-lt"/>
+              </a:rPr>
+            </a:br>
+            <a:r>
+              <a:rPr lang="en-US" dirty="0"/>
+              <a:t>Il </a:t>
+            </a:r>
+            <a:r>
+              <a:rPr lang="en-US" dirty="0" err="1"/>
+              <a:t>reçoit</a:t>
+            </a:r>
+            <a:r>
+              <a:rPr lang="en-US" dirty="0"/>
+              <a:t> </a:t>
+            </a:r>
+            <a:r>
+              <a:rPr lang="en-US" dirty="0" err="1"/>
+              <a:t>une</a:t>
+            </a:r>
+            <a:r>
+              <a:rPr lang="en-US" dirty="0"/>
+              <a:t> ordonnance et commence par </a:t>
+            </a:r>
+            <a:r>
+              <a:rPr lang="en-US" dirty="0" err="1"/>
+              <a:t>reconnaître</a:t>
+            </a:r>
+            <a:r>
+              <a:rPr lang="en-US" dirty="0"/>
+              <a:t> les noms des </a:t>
+            </a:r>
+            <a:r>
+              <a:rPr lang="en-US" dirty="0" err="1"/>
+              <a:t>médicaments</a:t>
+            </a:r>
+            <a:r>
+              <a:rPr lang="en-US" dirty="0"/>
+              <a:t>, y </a:t>
+            </a:r>
+            <a:r>
+              <a:rPr lang="en-US" dirty="0" err="1"/>
+              <a:t>compris</a:t>
+            </a:r>
+            <a:r>
+              <a:rPr lang="en-US" dirty="0"/>
+              <a:t> les noms </a:t>
+            </a:r>
+            <a:r>
+              <a:rPr lang="en-US" dirty="0" err="1"/>
+              <a:t>commerciaux</a:t>
+            </a:r>
+            <a:r>
+              <a:rPr lang="en-US" dirty="0"/>
+              <a:t> et les </a:t>
+            </a:r>
+            <a:r>
+              <a:rPr lang="en-US" dirty="0" err="1"/>
+              <a:t>fautes</a:t>
+            </a:r>
+            <a:r>
+              <a:rPr lang="en-US" dirty="0"/>
+              <a:t> de frappe, qui </a:t>
+            </a:r>
+            <a:r>
+              <a:rPr lang="en-US" dirty="0" err="1"/>
+              <a:t>sont</a:t>
+            </a:r>
+            <a:r>
+              <a:rPr lang="en-US" dirty="0"/>
+              <a:t> </a:t>
+            </a:r>
+            <a:r>
+              <a:rPr lang="en-US" dirty="0" err="1"/>
+              <a:t>signalées</a:t>
+            </a:r>
+            <a:r>
+              <a:rPr lang="en-US" dirty="0"/>
+              <a:t>.</a:t>
+            </a:r>
+            <a:br>
+              <a:rPr lang="en-US" dirty="0">
+                <a:cs typeface="+mn-lt"/>
+              </a:rPr>
+            </a:br>
+            <a:r>
+              <a:rPr lang="en-US" dirty="0"/>
+              <a:t>Il examine ensuite </a:t>
+            </a:r>
+            <a:r>
+              <a:rPr lang="en-US" dirty="0" err="1"/>
+              <a:t>chaque</a:t>
+            </a:r>
+            <a:r>
+              <a:rPr lang="en-US" dirty="0"/>
+              <a:t> </a:t>
+            </a:r>
+            <a:r>
+              <a:rPr lang="en-US" dirty="0" err="1"/>
+              <a:t>paire</a:t>
+            </a:r>
+            <a:r>
+              <a:rPr lang="en-US" dirty="0"/>
+              <a:t> de </a:t>
+            </a:r>
+            <a:r>
+              <a:rPr lang="en-US" dirty="0" err="1"/>
+              <a:t>médicaments</a:t>
+            </a:r>
+            <a:r>
+              <a:rPr lang="en-US" dirty="0"/>
+              <a:t> et </a:t>
+            </a:r>
+            <a:r>
+              <a:rPr lang="en-US" dirty="0" err="1"/>
+              <a:t>lui</a:t>
+            </a:r>
+            <a:r>
+              <a:rPr lang="en-US" dirty="0"/>
+              <a:t> applique deux </a:t>
+            </a:r>
+            <a:r>
+              <a:rPr lang="en-US" dirty="0" err="1"/>
+              <a:t>familles</a:t>
+            </a:r>
+            <a:r>
+              <a:rPr lang="en-US" dirty="0"/>
+              <a:t> de </a:t>
+            </a:r>
+            <a:r>
+              <a:rPr lang="en-US" dirty="0" err="1"/>
+              <a:t>règles</a:t>
+            </a:r>
+            <a:r>
+              <a:rPr lang="en-US" dirty="0"/>
+              <a:t> : des </a:t>
+            </a:r>
+            <a:r>
+              <a:rPr lang="en-US" dirty="0" err="1"/>
+              <a:t>règles</a:t>
+            </a:r>
+            <a:r>
+              <a:rPr lang="en-US" dirty="0"/>
+              <a:t> </a:t>
+            </a:r>
+            <a:r>
+              <a:rPr lang="en-US" dirty="0" err="1"/>
+              <a:t>expertes</a:t>
+            </a:r>
+            <a:r>
+              <a:rPr lang="en-US" dirty="0"/>
+              <a:t>, et des </a:t>
+            </a:r>
+            <a:r>
+              <a:rPr lang="en-US" dirty="0" err="1"/>
+              <a:t>règles</a:t>
+            </a:r>
+            <a:r>
+              <a:rPr lang="en-US" dirty="0"/>
+              <a:t> qui </a:t>
+            </a:r>
+            <a:r>
+              <a:rPr lang="en-US" dirty="0" err="1"/>
+              <a:t>exploitent</a:t>
+            </a:r>
+            <a:r>
+              <a:rPr lang="en-US" dirty="0"/>
+              <a:t> </a:t>
+            </a:r>
+            <a:r>
+              <a:rPr lang="en-US" dirty="0" err="1"/>
+              <a:t>directement</a:t>
+            </a:r>
+            <a:r>
+              <a:rPr lang="en-US" dirty="0"/>
+              <a:t> le </a:t>
+            </a:r>
+            <a:r>
+              <a:rPr lang="en-US" dirty="0" err="1"/>
+              <a:t>graphe</a:t>
+            </a:r>
+            <a:r>
+              <a:rPr lang="en-US" dirty="0"/>
+              <a:t>.</a:t>
+            </a:r>
+            <a:br>
+              <a:rPr lang="en-US" dirty="0">
+                <a:cs typeface="+mn-lt"/>
+              </a:rPr>
+            </a:br>
+            <a:r>
+              <a:rPr lang="en-US" dirty="0"/>
+              <a:t>Vient ensuite le </a:t>
+            </a:r>
+            <a:r>
+              <a:rPr lang="en-US" dirty="0" err="1"/>
+              <a:t>filtre</a:t>
+            </a:r>
+            <a:r>
+              <a:rPr lang="en-US" dirty="0"/>
+              <a:t> anti-fatigue : les </a:t>
+            </a:r>
+            <a:r>
+              <a:rPr lang="en-US" dirty="0" err="1"/>
+              <a:t>règles</a:t>
+            </a:r>
+            <a:r>
+              <a:rPr lang="en-US" dirty="0"/>
+              <a:t> </a:t>
+            </a:r>
+            <a:r>
+              <a:rPr lang="en-US" dirty="0" err="1"/>
+              <a:t>expertes</a:t>
+            </a:r>
+            <a:r>
+              <a:rPr lang="en-US" dirty="0"/>
+              <a:t> </a:t>
+            </a:r>
+            <a:r>
+              <a:rPr lang="en-US" dirty="0" err="1"/>
+              <a:t>sont</a:t>
+            </a:r>
+            <a:r>
+              <a:rPr lang="en-US" dirty="0"/>
+              <a:t> </a:t>
+            </a:r>
+            <a:r>
+              <a:rPr lang="en-US" dirty="0" err="1"/>
+              <a:t>toujours</a:t>
+            </a:r>
+            <a:r>
+              <a:rPr lang="en-US" dirty="0"/>
+              <a:t> </a:t>
+            </a:r>
+            <a:r>
+              <a:rPr lang="en-US" dirty="0" err="1"/>
+              <a:t>affichées</a:t>
+            </a:r>
+            <a:r>
+              <a:rPr lang="en-US" dirty="0"/>
+              <a:t>, </a:t>
+            </a:r>
+            <a:r>
+              <a:rPr lang="en-US" dirty="0" err="1"/>
+              <a:t>mais</a:t>
+            </a:r>
+            <a:r>
+              <a:rPr lang="en-US" dirty="0"/>
+              <a:t> les </a:t>
+            </a:r>
+            <a:r>
+              <a:rPr lang="en-US" dirty="0" err="1"/>
+              <a:t>signaux</a:t>
+            </a:r>
+            <a:r>
+              <a:rPr lang="en-US" dirty="0"/>
+              <a:t> du </a:t>
+            </a:r>
+            <a:r>
+              <a:rPr lang="en-US" dirty="0" err="1"/>
+              <a:t>graphe</a:t>
+            </a:r>
+            <a:r>
+              <a:rPr lang="en-US" dirty="0"/>
+              <a:t> ne le </a:t>
+            </a:r>
+            <a:r>
+              <a:rPr lang="en-US" dirty="0" err="1"/>
+              <a:t>sont</a:t>
+            </a:r>
+            <a:r>
+              <a:rPr lang="en-US" dirty="0"/>
+              <a:t> </a:t>
+            </a:r>
+            <a:r>
+              <a:rPr lang="en-US" dirty="0" err="1"/>
+              <a:t>que</a:t>
+            </a:r>
+            <a:r>
+              <a:rPr lang="en-US" dirty="0"/>
+              <a:t> </a:t>
+            </a:r>
+            <a:r>
+              <a:rPr lang="en-US" dirty="0" err="1"/>
+              <a:t>s’ils</a:t>
+            </a:r>
+            <a:r>
+              <a:rPr lang="en-US" dirty="0"/>
+              <a:t> </a:t>
+            </a:r>
+            <a:r>
+              <a:rPr lang="en-US" dirty="0" err="1"/>
+              <a:t>atteignent</a:t>
+            </a:r>
+            <a:r>
+              <a:rPr lang="en-US" dirty="0"/>
+              <a:t> le </a:t>
+            </a:r>
+            <a:r>
+              <a:rPr lang="en-US" dirty="0" err="1"/>
+              <a:t>niveau</a:t>
+            </a:r>
+            <a:r>
+              <a:rPr lang="en-US" dirty="0"/>
+              <a:t> 2.</a:t>
+            </a:r>
+            <a:br>
+              <a:rPr lang="en-US" dirty="0">
+                <a:cs typeface="+mn-lt"/>
+              </a:rPr>
+            </a:br>
+            <a:r>
+              <a:rPr lang="en-US" dirty="0"/>
+              <a:t>À la fin, les </a:t>
+            </a:r>
+            <a:r>
+              <a:rPr lang="en-US" dirty="0" err="1"/>
+              <a:t>alertes</a:t>
+            </a:r>
+            <a:r>
+              <a:rPr lang="en-US" dirty="0"/>
+              <a:t> </a:t>
+            </a:r>
+            <a:r>
+              <a:rPr lang="en-US" dirty="0" err="1"/>
+              <a:t>sont</a:t>
+            </a:r>
+            <a:r>
+              <a:rPr lang="en-US" dirty="0"/>
+              <a:t> </a:t>
+            </a:r>
+            <a:r>
+              <a:rPr lang="en-US" dirty="0" err="1"/>
+              <a:t>triées</a:t>
+            </a:r>
+            <a:r>
+              <a:rPr lang="en-US" dirty="0"/>
+              <a:t> par </a:t>
+            </a:r>
+            <a:r>
+              <a:rPr lang="en-US" dirty="0" err="1"/>
+              <a:t>gravité</a:t>
+            </a:r>
+            <a:r>
+              <a:rPr lang="en-US" dirty="0"/>
+              <a:t>, </a:t>
+            </a:r>
+            <a:r>
+              <a:rPr lang="en-US" dirty="0" err="1"/>
+              <a:t>chacune</a:t>
+            </a:r>
+            <a:r>
+              <a:rPr lang="en-US" dirty="0"/>
+              <a:t> avec </a:t>
+            </a:r>
+            <a:r>
+              <a:rPr lang="en-US" dirty="0" err="1"/>
+              <a:t>sa</a:t>
+            </a:r>
+            <a:r>
+              <a:rPr lang="en-US" dirty="0"/>
+              <a:t> </a:t>
+            </a:r>
+            <a:r>
+              <a:rPr lang="en-US" dirty="0" err="1"/>
+              <a:t>règle</a:t>
+            </a:r>
+            <a:r>
+              <a:rPr lang="en-US" dirty="0"/>
+              <a:t>, </a:t>
+            </a:r>
+            <a:r>
+              <a:rPr lang="en-US" dirty="0" err="1"/>
+              <a:t>sa</a:t>
+            </a:r>
+            <a:r>
+              <a:rPr lang="en-US" dirty="0"/>
+              <a:t> source et son chemin dans le </a:t>
+            </a:r>
+            <a:r>
+              <a:rPr lang="en-US" dirty="0" err="1"/>
+              <a:t>graphe</a:t>
+            </a:r>
+            <a:r>
+              <a:rPr lang="en-US" dirty="0"/>
+              <a:t>. Et un </a:t>
+            </a:r>
+            <a:r>
+              <a:rPr lang="en-US" dirty="0" err="1"/>
+              <a:t>médicament</a:t>
+            </a:r>
+            <a:r>
+              <a:rPr lang="en-US" dirty="0"/>
+              <a:t> inconnu est </a:t>
+            </a:r>
+            <a:r>
+              <a:rPr lang="en-US" dirty="0" err="1"/>
+              <a:t>toujours</a:t>
+            </a:r>
+            <a:r>
+              <a:rPr lang="en-US" dirty="0"/>
+              <a:t> </a:t>
+            </a:r>
+            <a:r>
+              <a:rPr lang="en-US" dirty="0" err="1"/>
+              <a:t>signalé</a:t>
+            </a:r>
+            <a:r>
+              <a:rPr lang="en-US" dirty="0"/>
+              <a:t>, jamais </a:t>
+            </a:r>
+            <a:r>
+              <a:rPr lang="en-US" dirty="0" err="1"/>
+              <a:t>ignoré</a:t>
+            </a:r>
+            <a:r>
+              <a:rPr lang="en-US" dirty="0"/>
+              <a:t>.</a:t>
+            </a:r>
+            <a:endParaRPr lang="fr-FR" dirty="0"/>
+          </a:p>
+          <a:p>
+            <a:endParaRPr lang="fr-FR"/>
           </a:p>
         </p:txBody>
       </p:sp>
@@ -1300,9 +3194,473 @@
           <a:lstStyle/>
           <a:p>
             <a:r>
-              <a:rPr lang="en-US" dirty="0"/>
-              <a:t>B (Aziz) peut présenter R19-R24, qui viennent de sa version. Insister : la classe d'un médicament vient d'abord du graphe ; la table ATC ne sert que quand le graphe ne le classe pas. Les signaux G2/G3 sont trop fréquents pour être affichés seuls.</a:t>
-            </a:r>
+              <a:rPr lang="en-US" dirty="0" err="1"/>
+              <a:t>Concrètement</a:t>
+            </a:r>
+            <a:r>
+              <a:rPr lang="en-US" dirty="0"/>
+              <a:t>, nous </a:t>
+            </a:r>
+            <a:r>
+              <a:rPr lang="en-US" dirty="0" err="1"/>
+              <a:t>avons</a:t>
+            </a:r>
+            <a:r>
+              <a:rPr lang="en-US" dirty="0"/>
+              <a:t> 24 </a:t>
+            </a:r>
+            <a:r>
+              <a:rPr lang="en-US" dirty="0" err="1"/>
+              <a:t>règles</a:t>
+            </a:r>
+            <a:r>
+              <a:rPr lang="en-US" dirty="0"/>
+              <a:t> </a:t>
+            </a:r>
+            <a:r>
+              <a:rPr lang="en-US" dirty="0" err="1"/>
+              <a:t>expertes</a:t>
+            </a:r>
+            <a:r>
+              <a:rPr lang="en-US" dirty="0"/>
+              <a:t> et 3 </a:t>
+            </a:r>
+            <a:r>
+              <a:rPr lang="en-US" dirty="0" err="1"/>
+              <a:t>règles</a:t>
+            </a:r>
+            <a:r>
+              <a:rPr lang="en-US" dirty="0"/>
+              <a:t> issues du </a:t>
+            </a:r>
+            <a:r>
+              <a:rPr lang="en-US" dirty="0" err="1"/>
+              <a:t>graphe</a:t>
+            </a:r>
+            <a:r>
+              <a:rPr lang="en-US" dirty="0"/>
+              <a:t>.</a:t>
+            </a:r>
+            <a:br>
+              <a:rPr lang="en-US" dirty="0">
+                <a:cs typeface="+mn-lt"/>
+              </a:rPr>
+            </a:br>
+            <a:r>
+              <a:rPr lang="en-US" dirty="0"/>
+              <a:t>Les </a:t>
+            </a:r>
+            <a:r>
+              <a:rPr lang="en-US" dirty="0" err="1"/>
+              <a:t>règles</a:t>
+            </a:r>
+            <a:r>
+              <a:rPr lang="en-US" dirty="0"/>
+              <a:t> R01 à R18 </a:t>
+            </a:r>
+            <a:r>
+              <a:rPr lang="en-US" dirty="0" err="1"/>
+              <a:t>couvrent</a:t>
+            </a:r>
+            <a:r>
+              <a:rPr lang="en-US" dirty="0"/>
+              <a:t> des associations </a:t>
+            </a:r>
+            <a:r>
+              <a:rPr lang="en-US" dirty="0" err="1"/>
+              <a:t>connues</a:t>
+            </a:r>
+            <a:r>
+              <a:rPr lang="en-US" dirty="0"/>
+              <a:t> entre classes : par </a:t>
+            </a:r>
+            <a:r>
+              <a:rPr lang="en-US" dirty="0" err="1"/>
+              <a:t>exemple</a:t>
+            </a:r>
+            <a:r>
+              <a:rPr lang="en-US" dirty="0"/>
+              <a:t> un anticoagulant AVK avec un anti-</a:t>
+            </a:r>
+            <a:r>
+              <a:rPr lang="en-US" dirty="0" err="1"/>
+              <a:t>inflammatoire</a:t>
+            </a:r>
+            <a:r>
+              <a:rPr lang="en-US" dirty="0"/>
+              <a:t>, </a:t>
+            </a:r>
+            <a:r>
+              <a:rPr lang="en-US" dirty="0" err="1"/>
+              <a:t>une</a:t>
+            </a:r>
+            <a:r>
+              <a:rPr lang="en-US" dirty="0"/>
+              <a:t> </a:t>
+            </a:r>
+            <a:r>
+              <a:rPr lang="en-US" dirty="0" err="1"/>
+              <a:t>statine</a:t>
+            </a:r>
+            <a:r>
+              <a:rPr lang="en-US" dirty="0"/>
+              <a:t> avec un </a:t>
+            </a:r>
+            <a:r>
+              <a:rPr lang="en-US" dirty="0" err="1"/>
+              <a:t>inhibiteur</a:t>
+            </a:r>
+            <a:r>
+              <a:rPr lang="en-US" dirty="0"/>
+              <a:t> du CYP3A4, </a:t>
+            </a:r>
+            <a:r>
+              <a:rPr lang="en-US" dirty="0" err="1"/>
+              <a:t>ou</a:t>
+            </a:r>
+            <a:r>
+              <a:rPr lang="en-US" dirty="0"/>
+              <a:t> un </a:t>
+            </a:r>
+            <a:r>
+              <a:rPr lang="en-US" dirty="0" err="1"/>
+              <a:t>dérivé</a:t>
+            </a:r>
+            <a:r>
+              <a:rPr lang="en-US" dirty="0"/>
+              <a:t> </a:t>
+            </a:r>
+            <a:r>
+              <a:rPr lang="en-US" dirty="0" err="1"/>
+              <a:t>nitré</a:t>
+            </a:r>
+            <a:r>
+              <a:rPr lang="en-US" dirty="0"/>
+              <a:t> avec le Viagra.</a:t>
+            </a:r>
+            <a:br>
+              <a:rPr lang="en-US" dirty="0">
+                <a:cs typeface="+mn-lt"/>
+              </a:rPr>
+            </a:br>
+            <a:r>
+              <a:rPr lang="en-US" dirty="0"/>
+              <a:t>(Aziz :) Les </a:t>
+            </a:r>
+            <a:r>
+              <a:rPr lang="en-US" dirty="0" err="1"/>
+              <a:t>règles</a:t>
+            </a:r>
+            <a:r>
+              <a:rPr lang="en-US" dirty="0"/>
+              <a:t> R19 à R24 </a:t>
+            </a:r>
+            <a:r>
+              <a:rPr lang="en-US" dirty="0" err="1"/>
+              <a:t>viennent</a:t>
+            </a:r>
+            <a:r>
+              <a:rPr lang="en-US" dirty="0"/>
+              <a:t> de ma version : </a:t>
+            </a:r>
+            <a:r>
+              <a:rPr lang="en-US" dirty="0" err="1"/>
+              <a:t>antidépresseurs</a:t>
+            </a:r>
+            <a:r>
+              <a:rPr lang="en-US" dirty="0"/>
+              <a:t> ISRS avec AINS </a:t>
+            </a:r>
+            <a:r>
+              <a:rPr lang="en-US" dirty="0" err="1"/>
+              <a:t>ou</a:t>
+            </a:r>
+            <a:r>
+              <a:rPr lang="en-US" dirty="0"/>
+              <a:t> anticoagulants, </a:t>
+            </a:r>
+            <a:r>
+              <a:rPr lang="en-US" dirty="0" err="1"/>
+              <a:t>digoxine</a:t>
+            </a:r>
+            <a:r>
+              <a:rPr lang="en-US" dirty="0"/>
+              <a:t> avec macrolides, et potassium avec les </a:t>
+            </a:r>
+            <a:r>
+              <a:rPr lang="en-US" dirty="0" err="1"/>
+              <a:t>diurétiques</a:t>
+            </a:r>
+            <a:r>
+              <a:rPr lang="en-US" dirty="0"/>
+              <a:t> </a:t>
+            </a:r>
+            <a:r>
+              <a:rPr lang="en-US" dirty="0" err="1"/>
+              <a:t>épargneurs</a:t>
+            </a:r>
+            <a:r>
+              <a:rPr lang="en-US" dirty="0"/>
+              <a:t>.</a:t>
+            </a:r>
+            <a:br>
+              <a:rPr lang="en-US" dirty="0">
+                <a:cs typeface="+mn-lt"/>
+              </a:rPr>
+            </a:br>
+            <a:r>
+              <a:rPr lang="en-US" dirty="0"/>
+              <a:t>Les </a:t>
+            </a:r>
+            <a:r>
+              <a:rPr lang="en-US" dirty="0" err="1"/>
+              <a:t>règles</a:t>
+            </a:r>
+            <a:r>
+              <a:rPr lang="en-US" dirty="0"/>
+              <a:t> du </a:t>
+            </a:r>
+            <a:r>
+              <a:rPr lang="en-US" dirty="0" err="1"/>
+              <a:t>graphe</a:t>
+            </a:r>
+            <a:r>
+              <a:rPr lang="en-US" dirty="0"/>
+              <a:t>, </a:t>
+            </a:r>
+            <a:r>
+              <a:rPr lang="en-US" dirty="0" err="1"/>
+              <a:t>elles</a:t>
+            </a:r>
+            <a:r>
+              <a:rPr lang="en-US" dirty="0"/>
+              <a:t>, </a:t>
+            </a:r>
+            <a:r>
+              <a:rPr lang="en-US" dirty="0" err="1"/>
+              <a:t>détectent</a:t>
+            </a:r>
+            <a:r>
+              <a:rPr lang="en-US" dirty="0"/>
+              <a:t> des </a:t>
+            </a:r>
+            <a:r>
+              <a:rPr lang="en-US" dirty="0" err="1"/>
+              <a:t>mécanismes</a:t>
+            </a:r>
+            <a:r>
+              <a:rPr lang="en-US" dirty="0"/>
+              <a:t>. La </a:t>
+            </a:r>
+            <a:r>
+              <a:rPr lang="en-US" dirty="0" err="1"/>
+              <a:t>règle</a:t>
+            </a:r>
+            <a:r>
+              <a:rPr lang="en-US" dirty="0"/>
+              <a:t> G1 </a:t>
+            </a:r>
+            <a:r>
+              <a:rPr lang="en-US" dirty="0" err="1"/>
+              <a:t>repère</a:t>
+            </a:r>
+            <a:r>
+              <a:rPr lang="en-US" dirty="0"/>
+              <a:t> un </a:t>
+            </a:r>
+            <a:r>
+              <a:rPr lang="en-US" dirty="0" err="1"/>
+              <a:t>médicament</a:t>
+            </a:r>
+            <a:r>
+              <a:rPr lang="en-US" dirty="0"/>
+              <a:t> qui </a:t>
+            </a:r>
+            <a:r>
+              <a:rPr lang="en-US" dirty="0" err="1"/>
+              <a:t>bloque</a:t>
+            </a:r>
+            <a:r>
+              <a:rPr lang="en-US" dirty="0"/>
+              <a:t> </a:t>
+            </a:r>
+            <a:r>
+              <a:rPr lang="en-US" dirty="0" err="1"/>
+              <a:t>l’enzyme</a:t>
+            </a:r>
+            <a:r>
+              <a:rPr lang="en-US" dirty="0"/>
+              <a:t> </a:t>
+            </a:r>
+            <a:r>
+              <a:rPr lang="en-US" dirty="0" err="1"/>
+              <a:t>dont</a:t>
+            </a:r>
+            <a:r>
+              <a:rPr lang="en-US" dirty="0"/>
+              <a:t> un </a:t>
+            </a:r>
+            <a:r>
+              <a:rPr lang="en-US" dirty="0" err="1"/>
+              <a:t>autre</a:t>
+            </a:r>
+            <a:r>
+              <a:rPr lang="en-US" dirty="0"/>
+              <a:t> </a:t>
+            </a:r>
+            <a:r>
+              <a:rPr lang="en-US" dirty="0" err="1"/>
+              <a:t>dépend</a:t>
+            </a:r>
+            <a:r>
+              <a:rPr lang="en-US" dirty="0"/>
+              <a:t> ; </a:t>
+            </a:r>
+            <a:r>
+              <a:rPr lang="en-US" dirty="0" err="1"/>
+              <a:t>elle</a:t>
+            </a:r>
+            <a:r>
+              <a:rPr lang="en-US" dirty="0"/>
+              <a:t> ne monte au </a:t>
+            </a:r>
+            <a:r>
+              <a:rPr lang="en-US" dirty="0" err="1"/>
+              <a:t>niveau</a:t>
+            </a:r>
+            <a:r>
+              <a:rPr lang="en-US" dirty="0"/>
+              <a:t> 2 </a:t>
+            </a:r>
+            <a:r>
+              <a:rPr lang="en-US" dirty="0" err="1"/>
+              <a:t>que</a:t>
+            </a:r>
+            <a:r>
+              <a:rPr lang="en-US" dirty="0"/>
+              <a:t> </a:t>
+            </a:r>
+            <a:r>
+              <a:rPr lang="en-US" dirty="0" err="1"/>
+              <a:t>si</a:t>
+            </a:r>
+            <a:r>
+              <a:rPr lang="en-US" dirty="0"/>
+              <a:t> le second est à marge </a:t>
+            </a:r>
+            <a:r>
+              <a:rPr lang="en-US" dirty="0" err="1"/>
+              <a:t>étroite</a:t>
+            </a:r>
+            <a:r>
+              <a:rPr lang="en-US" dirty="0"/>
+              <a:t>. G2 et G3, </a:t>
+            </a:r>
+            <a:r>
+              <a:rPr lang="en-US" dirty="0" err="1"/>
+              <a:t>effet</a:t>
+            </a:r>
+            <a:r>
+              <a:rPr lang="en-US" dirty="0"/>
+              <a:t> </a:t>
+            </a:r>
+            <a:r>
+              <a:rPr lang="en-US" dirty="0" err="1"/>
+              <a:t>ou</a:t>
+            </a:r>
+            <a:r>
+              <a:rPr lang="en-US" dirty="0"/>
+              <a:t> </a:t>
+            </a:r>
+            <a:r>
+              <a:rPr lang="en-US" dirty="0" err="1"/>
+              <a:t>cible</a:t>
+            </a:r>
+            <a:r>
+              <a:rPr lang="en-US" dirty="0"/>
+              <a:t> commune, </a:t>
+            </a:r>
+            <a:r>
+              <a:rPr lang="en-US" dirty="0" err="1"/>
+              <a:t>restent</a:t>
+            </a:r>
+            <a:r>
+              <a:rPr lang="en-US" dirty="0"/>
+              <a:t> des </a:t>
+            </a:r>
+            <a:r>
+              <a:rPr lang="en-US" dirty="0" err="1"/>
+              <a:t>signaux</a:t>
+            </a:r>
+            <a:r>
+              <a:rPr lang="en-US" dirty="0"/>
+              <a:t> </a:t>
+            </a:r>
+            <a:r>
+              <a:rPr lang="en-US" dirty="0" err="1"/>
+              <a:t>faibles</a:t>
+            </a:r>
+            <a:r>
+              <a:rPr lang="en-US" dirty="0"/>
+              <a:t>.</a:t>
+            </a:r>
+            <a:br>
+              <a:rPr lang="en-US" dirty="0">
+                <a:cs typeface="+mn-lt"/>
+              </a:rPr>
+            </a:br>
+            <a:r>
+              <a:rPr lang="en-US" dirty="0" err="1"/>
+              <a:t>Toutes</a:t>
+            </a:r>
+            <a:r>
+              <a:rPr lang="en-US" dirty="0"/>
+              <a:t> </a:t>
+            </a:r>
+            <a:r>
+              <a:rPr lang="en-US" dirty="0" err="1"/>
+              <a:t>nos</a:t>
+            </a:r>
+            <a:r>
+              <a:rPr lang="en-US" dirty="0"/>
+              <a:t> </a:t>
+            </a:r>
+            <a:r>
+              <a:rPr lang="en-US" dirty="0" err="1"/>
+              <a:t>règles</a:t>
+            </a:r>
+            <a:r>
+              <a:rPr lang="en-US" dirty="0"/>
+              <a:t> </a:t>
+            </a:r>
+            <a:r>
+              <a:rPr lang="en-US" dirty="0" err="1"/>
+              <a:t>sont</a:t>
+            </a:r>
+            <a:r>
+              <a:rPr lang="en-US" dirty="0"/>
+              <a:t> </a:t>
+            </a:r>
+            <a:r>
+              <a:rPr lang="en-US" dirty="0" err="1"/>
+              <a:t>sourcées</a:t>
+            </a:r>
+            <a:r>
+              <a:rPr lang="en-US" dirty="0"/>
+              <a:t> : </a:t>
+            </a:r>
+            <a:r>
+              <a:rPr lang="en-US" dirty="0" err="1"/>
+              <a:t>Thésaurus</a:t>
+            </a:r>
+            <a:r>
+              <a:rPr lang="en-US" dirty="0"/>
+              <a:t> ANSM, classification ATC, notices EMA et FDA.</a:t>
+            </a:r>
+            <a:endParaRPr lang="fr-FR" dirty="0"/>
+          </a:p>
+          <a:p>
+            <a:endParaRPr lang="fr-FR"/>
           </a:p>
         </p:txBody>
       </p:sp>
@@ -1387,9 +3745,354 @@
           <a:lstStyle/>
           <a:p>
             <a:r>
-              <a:rPr lang="en-US" dirty="0"/>
-              <a:t>Démo possible en direct. Montrer que 100 % des alertes portent une règle, une source et un chemin. Le même exemple avec Previscan + Advil montre l'intérêt des synonymes et de la table quand le graphe ne connaît pas le médicament.</a:t>
-            </a:r>
+              <a:rPr lang="en-US" dirty="0" err="1"/>
+              <a:t>Voici</a:t>
+            </a:r>
+            <a:r>
+              <a:rPr lang="en-US" dirty="0"/>
+              <a:t> un </a:t>
+            </a:r>
+            <a:r>
+              <a:rPr lang="en-US" dirty="0" err="1"/>
+              <a:t>exemple</a:t>
+            </a:r>
+            <a:r>
+              <a:rPr lang="en-US" dirty="0"/>
+              <a:t> </a:t>
+            </a:r>
+            <a:r>
+              <a:rPr lang="en-US" dirty="0" err="1"/>
+              <a:t>concret</a:t>
+            </a:r>
+            <a:r>
+              <a:rPr lang="en-US" dirty="0"/>
+              <a:t>. On </a:t>
+            </a:r>
+            <a:r>
+              <a:rPr lang="en-US" dirty="0" err="1"/>
+              <a:t>saisit</a:t>
+            </a:r>
+            <a:r>
+              <a:rPr lang="en-US" dirty="0"/>
+              <a:t> </a:t>
+            </a:r>
+            <a:r>
+              <a:rPr lang="en-US" dirty="0" err="1"/>
+              <a:t>warfarine</a:t>
+            </a:r>
+            <a:r>
+              <a:rPr lang="en-US" dirty="0"/>
+              <a:t>, </a:t>
+            </a:r>
+            <a:r>
+              <a:rPr lang="en-US" dirty="0" err="1"/>
+              <a:t>ibuprofène</a:t>
+            </a:r>
+            <a:r>
+              <a:rPr lang="en-US" dirty="0"/>
+              <a:t> et </a:t>
+            </a:r>
+            <a:r>
+              <a:rPr lang="en-US" dirty="0" err="1"/>
+              <a:t>oméprazole</a:t>
+            </a:r>
+            <a:r>
+              <a:rPr lang="en-US" dirty="0"/>
+              <a:t>.</a:t>
+            </a:r>
+            <a:br>
+              <a:rPr lang="en-US" dirty="0"/>
+            </a:br>
+            <a:r>
+              <a:rPr lang="en-US" dirty="0"/>
+              <a:t>Le </a:t>
+            </a:r>
+            <a:r>
+              <a:rPr lang="en-US" dirty="0" err="1"/>
+              <a:t>système</a:t>
+            </a:r>
+            <a:r>
+              <a:rPr lang="en-US" dirty="0"/>
+              <a:t> </a:t>
+            </a:r>
+            <a:r>
+              <a:rPr lang="en-US" dirty="0" err="1"/>
+              <a:t>détecte</a:t>
+            </a:r>
+            <a:r>
+              <a:rPr lang="en-US" dirty="0"/>
+              <a:t> </a:t>
+            </a:r>
+            <a:r>
+              <a:rPr lang="en-US" dirty="0" err="1"/>
+              <a:t>une</a:t>
+            </a:r>
+            <a:r>
+              <a:rPr lang="en-US" dirty="0"/>
+              <a:t> association </a:t>
+            </a:r>
+            <a:r>
+              <a:rPr lang="en-US" dirty="0" err="1"/>
+              <a:t>déconseillée</a:t>
+            </a:r>
+            <a:r>
+              <a:rPr lang="en-US" dirty="0"/>
+              <a:t> entre la </a:t>
+            </a:r>
+            <a:r>
+              <a:rPr lang="en-US" dirty="0" err="1"/>
+              <a:t>warfarine</a:t>
+            </a:r>
+            <a:r>
+              <a:rPr lang="en-US" dirty="0"/>
+              <a:t> et </a:t>
+            </a:r>
+            <a:r>
+              <a:rPr lang="en-US" dirty="0" err="1"/>
+              <a:t>l’ibuprofène</a:t>
+            </a:r>
+            <a:r>
+              <a:rPr lang="en-US" dirty="0"/>
+              <a:t> : </a:t>
+            </a:r>
+            <a:r>
+              <a:rPr lang="en-US" dirty="0" err="1"/>
+              <a:t>c’est</a:t>
+            </a:r>
+            <a:r>
+              <a:rPr lang="en-US" dirty="0"/>
+              <a:t> la </a:t>
+            </a:r>
+            <a:r>
+              <a:rPr lang="en-US" dirty="0" err="1"/>
+              <a:t>règle</a:t>
+            </a:r>
+            <a:r>
+              <a:rPr lang="en-US" dirty="0"/>
+              <a:t> R01, qui </a:t>
+            </a:r>
+            <a:r>
+              <a:rPr lang="en-US" dirty="0" err="1"/>
+              <a:t>signale</a:t>
+            </a:r>
+            <a:r>
+              <a:rPr lang="en-US" dirty="0"/>
+              <a:t> un </a:t>
+            </a:r>
+            <a:r>
+              <a:rPr lang="en-US" dirty="0" err="1"/>
+              <a:t>risque</a:t>
+            </a:r>
+            <a:r>
+              <a:rPr lang="en-US" dirty="0"/>
+              <a:t> de </a:t>
+            </a:r>
+            <a:r>
+              <a:rPr lang="en-US" dirty="0" err="1"/>
+              <a:t>saignement</a:t>
+            </a:r>
+            <a:r>
+              <a:rPr lang="en-US" dirty="0"/>
+              <a:t>.</a:t>
+            </a:r>
+            <a:br>
+              <a:rPr lang="en-US" dirty="0"/>
+            </a:br>
+            <a:r>
+              <a:rPr lang="en-US" dirty="0"/>
+              <a:t>Et il </a:t>
+            </a:r>
+            <a:r>
+              <a:rPr lang="en-US" dirty="0" err="1"/>
+              <a:t>explique</a:t>
+            </a:r>
+            <a:r>
+              <a:rPr lang="en-US" dirty="0"/>
+              <a:t> </a:t>
+            </a:r>
+            <a:r>
+              <a:rPr lang="en-US" dirty="0" err="1"/>
+              <a:t>pourquoi</a:t>
+            </a:r>
+            <a:r>
+              <a:rPr lang="en-US" dirty="0"/>
+              <a:t> : la </a:t>
+            </a:r>
+            <a:r>
+              <a:rPr lang="en-US" dirty="0" err="1"/>
+              <a:t>warfarine</a:t>
+            </a:r>
+            <a:r>
+              <a:rPr lang="en-US" dirty="0"/>
+              <a:t> </a:t>
+            </a:r>
+            <a:r>
+              <a:rPr lang="en-US" dirty="0" err="1"/>
+              <a:t>appartient</a:t>
+            </a:r>
+            <a:r>
+              <a:rPr lang="en-US" dirty="0"/>
+              <a:t> à la </a:t>
+            </a:r>
+            <a:r>
+              <a:rPr lang="en-US" dirty="0" err="1"/>
+              <a:t>classe</a:t>
+            </a:r>
+            <a:r>
+              <a:rPr lang="en-US" dirty="0"/>
+              <a:t> des </a:t>
+            </a:r>
+            <a:r>
+              <a:rPr lang="en-US" dirty="0" err="1"/>
+              <a:t>antivitamines</a:t>
+            </a:r>
+            <a:r>
+              <a:rPr lang="en-US" dirty="0"/>
+              <a:t> K, </a:t>
+            </a:r>
+            <a:r>
+              <a:rPr lang="en-US" dirty="0" err="1"/>
+              <a:t>l’ibuprofène</a:t>
+            </a:r>
+            <a:r>
+              <a:rPr lang="en-US" dirty="0"/>
+              <a:t> à </a:t>
+            </a:r>
+            <a:r>
+              <a:rPr lang="en-US" dirty="0" err="1"/>
+              <a:t>celle</a:t>
+            </a:r>
+            <a:r>
+              <a:rPr lang="en-US" dirty="0"/>
+              <a:t> des anti-</a:t>
+            </a:r>
+            <a:r>
+              <a:rPr lang="en-US" dirty="0" err="1"/>
+              <a:t>inflammatoires</a:t>
+            </a:r>
+            <a:r>
+              <a:rPr lang="en-US" dirty="0"/>
+              <a:t>, </a:t>
+            </a:r>
+            <a:r>
+              <a:rPr lang="en-US" dirty="0" err="1"/>
+              <a:t>selon</a:t>
+            </a:r>
+            <a:r>
+              <a:rPr lang="en-US" dirty="0"/>
+              <a:t> le </a:t>
+            </a:r>
+            <a:r>
+              <a:rPr lang="en-US" dirty="0" err="1"/>
+              <a:t>graphe</a:t>
+            </a:r>
+            <a:r>
+              <a:rPr lang="en-US" dirty="0"/>
+              <a:t>. La source est le </a:t>
+            </a:r>
+            <a:r>
+              <a:rPr lang="en-US" dirty="0" err="1"/>
+              <a:t>Thésaurus</a:t>
+            </a:r>
+            <a:r>
+              <a:rPr lang="en-US" dirty="0"/>
+              <a:t> de </a:t>
+            </a:r>
+            <a:r>
+              <a:rPr lang="en-US" dirty="0" err="1"/>
+              <a:t>l’ANSM</a:t>
+            </a:r>
+            <a:r>
+              <a:rPr lang="en-US" dirty="0"/>
+              <a:t>.</a:t>
+            </a:r>
+            <a:br>
+              <a:rPr lang="en-US" dirty="0"/>
+            </a:br>
+            <a:r>
+              <a:rPr lang="en-US" dirty="0" err="1"/>
+              <a:t>Autre</a:t>
+            </a:r>
+            <a:r>
+              <a:rPr lang="en-US" dirty="0"/>
+              <a:t> point fort : un </a:t>
+            </a:r>
+            <a:r>
+              <a:rPr lang="en-US" dirty="0" err="1"/>
+              <a:t>médicament</a:t>
+            </a:r>
+            <a:r>
+              <a:rPr lang="en-US" dirty="0"/>
+              <a:t> </a:t>
+            </a:r>
+            <a:r>
+              <a:rPr lang="en-US" dirty="0" err="1"/>
+              <a:t>comme</a:t>
+            </a:r>
+            <a:r>
+              <a:rPr lang="en-US" dirty="0"/>
+              <a:t> le </a:t>
+            </a:r>
+            <a:r>
+              <a:rPr lang="en-US" dirty="0" err="1"/>
+              <a:t>Previscan</a:t>
+            </a:r>
+            <a:r>
+              <a:rPr lang="en-US" dirty="0"/>
+              <a:t>, absent du </a:t>
+            </a:r>
+            <a:r>
+              <a:rPr lang="en-US" dirty="0" err="1"/>
+              <a:t>graphe</a:t>
+            </a:r>
+            <a:r>
+              <a:rPr lang="en-US" dirty="0"/>
+              <a:t>, est </a:t>
+            </a:r>
+            <a:r>
+              <a:rPr lang="en-US" dirty="0" err="1"/>
+              <a:t>quand</a:t>
+            </a:r>
+            <a:r>
+              <a:rPr lang="en-US" dirty="0"/>
+              <a:t> </a:t>
+            </a:r>
+            <a:r>
+              <a:rPr lang="en-US" dirty="0" err="1"/>
+              <a:t>même</a:t>
+            </a:r>
+            <a:r>
+              <a:rPr lang="en-US" dirty="0"/>
+              <a:t> </a:t>
+            </a:r>
+            <a:r>
+              <a:rPr lang="en-US" dirty="0" err="1"/>
+              <a:t>reconnu</a:t>
+            </a:r>
+            <a:r>
+              <a:rPr lang="en-US" dirty="0"/>
+              <a:t> et </a:t>
+            </a:r>
+            <a:r>
+              <a:rPr lang="en-US" dirty="0" err="1"/>
+              <a:t>classé</a:t>
+            </a:r>
+            <a:r>
+              <a:rPr lang="en-US" dirty="0"/>
+              <a:t> grâce à </a:t>
+            </a:r>
+            <a:r>
+              <a:rPr lang="en-US" dirty="0" err="1"/>
+              <a:t>notre</a:t>
+            </a:r>
+            <a:r>
+              <a:rPr lang="en-US" dirty="0"/>
+              <a:t> table ATC.</a:t>
+            </a:r>
+            <a:endParaRPr lang="fr-FR" dirty="0"/>
+          </a:p>
+          <a:p>
+            <a:endParaRPr lang="fr-FR"/>
           </a:p>
         </p:txBody>
       </p:sp>
@@ -1475,8 +4178,392 @@
           <a:p>
             <a:r>
               <a:rPr lang="en-US" dirty="0"/>
-              <a:t>B (Aziz). Chacun a écrit 20 ordonnances avec leurs paires attendues et leurs sources. La référence non hybride isole ce qu'apportent les classes et le graphe. Annoncer d'emblée le biais : celui qui écrit les règles écrit aussi le test.</a:t>
-            </a:r>
+              <a:t>Pour </a:t>
+            </a:r>
+            <a:r>
+              <a:rPr lang="en-US" dirty="0" err="1"/>
+              <a:t>évaluer</a:t>
+            </a:r>
+            <a:r>
+              <a:rPr lang="en-US" dirty="0"/>
+              <a:t> le </a:t>
+            </a:r>
+            <a:r>
+              <a:rPr lang="en-US" dirty="0" err="1"/>
+              <a:t>système</a:t>
+            </a:r>
+            <a:r>
+              <a:rPr lang="en-US" dirty="0"/>
+              <a:t>, nous </a:t>
+            </a:r>
+            <a:r>
+              <a:rPr lang="en-US" dirty="0" err="1"/>
+              <a:t>avons</a:t>
+            </a:r>
+            <a:r>
+              <a:rPr lang="en-US" dirty="0"/>
+              <a:t> </a:t>
+            </a:r>
+            <a:r>
+              <a:rPr lang="en-US" dirty="0" err="1"/>
+              <a:t>réuni</a:t>
+            </a:r>
+            <a:r>
+              <a:rPr lang="en-US" dirty="0"/>
+              <a:t> 40 ordonnances, 20 </a:t>
+            </a:r>
+            <a:r>
+              <a:rPr lang="en-US" dirty="0" err="1"/>
+              <a:t>écrites</a:t>
+            </a:r>
+            <a:r>
+              <a:rPr lang="en-US" dirty="0"/>
+              <a:t> par chacun de nous, avec 54 associations à </a:t>
+            </a:r>
+            <a:r>
+              <a:rPr lang="en-US" dirty="0" err="1"/>
+              <a:t>risque</a:t>
+            </a:r>
+            <a:r>
+              <a:rPr lang="en-US" dirty="0"/>
+              <a:t> </a:t>
+            </a:r>
+            <a:r>
+              <a:rPr lang="en-US" dirty="0" err="1"/>
+              <a:t>attendues</a:t>
+            </a:r>
+            <a:r>
+              <a:rPr lang="en-US" dirty="0"/>
+              <a:t>.</a:t>
+            </a:r>
+            <a:br>
+              <a:rPr lang="en-US" dirty="0">
+                <a:cs typeface="+mn-lt"/>
+              </a:rPr>
+            </a:br>
+            <a:r>
+              <a:rPr lang="en-US" dirty="0"/>
+              <a:t>Nous le </a:t>
+            </a:r>
+            <a:r>
+              <a:rPr lang="en-US" dirty="0" err="1"/>
+              <a:t>comparons</a:t>
+            </a:r>
+            <a:r>
+              <a:rPr lang="en-US" dirty="0"/>
+              <a:t> à </a:t>
+            </a:r>
+            <a:r>
+              <a:rPr lang="en-US" dirty="0" err="1"/>
+              <a:t>une</a:t>
+            </a:r>
+            <a:r>
+              <a:rPr lang="en-US" dirty="0"/>
+              <a:t> </a:t>
+            </a:r>
+            <a:r>
+              <a:rPr lang="en-US" dirty="0" err="1"/>
+              <a:t>référence</a:t>
+            </a:r>
+            <a:r>
+              <a:rPr lang="en-US" dirty="0"/>
+              <a:t> non </a:t>
+            </a:r>
+            <a:r>
+              <a:rPr lang="en-US" dirty="0" err="1"/>
+              <a:t>hybride</a:t>
+            </a:r>
+            <a:r>
+              <a:rPr lang="en-US" dirty="0"/>
+              <a:t> : </a:t>
+            </a:r>
+            <a:r>
+              <a:rPr lang="en-US" dirty="0" err="1"/>
+              <a:t>une</a:t>
+            </a:r>
+            <a:r>
+              <a:rPr lang="en-US" dirty="0"/>
+              <a:t> simple </a:t>
+            </a:r>
+            <a:r>
+              <a:rPr lang="en-US" dirty="0" err="1"/>
+              <a:t>liste</a:t>
+            </a:r>
+            <a:r>
+              <a:rPr lang="en-US" dirty="0"/>
+              <a:t> de 26 associations </a:t>
+            </a:r>
+            <a:r>
+              <a:rPr lang="en-US" dirty="0" err="1"/>
+              <a:t>connues</a:t>
+            </a:r>
+            <a:r>
+              <a:rPr lang="en-US" dirty="0"/>
+              <a:t>, sans </a:t>
+            </a:r>
+            <a:r>
+              <a:rPr lang="en-US" dirty="0" err="1"/>
+              <a:t>graphe</a:t>
+            </a:r>
+            <a:r>
+              <a:rPr lang="en-US" dirty="0"/>
+              <a:t> </a:t>
+            </a:r>
+            <a:r>
+              <a:rPr lang="en-US" dirty="0" err="1"/>
+              <a:t>ni</a:t>
+            </a:r>
+            <a:r>
+              <a:rPr lang="en-US" dirty="0"/>
+              <a:t> classes.</a:t>
+            </a:r>
+            <a:br>
+              <a:rPr lang="en-US" dirty="0">
+                <a:cs typeface="+mn-lt"/>
+              </a:rPr>
+            </a:br>
+            <a:r>
+              <a:rPr lang="en-US" dirty="0"/>
+              <a:t>Nous </a:t>
+            </a:r>
+            <a:r>
+              <a:rPr lang="en-US" dirty="0" err="1"/>
+              <a:t>mesurons</a:t>
+            </a:r>
+            <a:r>
+              <a:rPr lang="en-US" dirty="0"/>
+              <a:t> la </a:t>
+            </a:r>
+            <a:r>
+              <a:rPr lang="en-US" dirty="0" err="1"/>
+              <a:t>précision</a:t>
+            </a:r>
+            <a:r>
+              <a:rPr lang="en-US" dirty="0"/>
+              <a:t>, le rappel, le F1, le </a:t>
+            </a:r>
+            <a:r>
+              <a:rPr lang="en-US" dirty="0" err="1"/>
+              <a:t>niveau</a:t>
+            </a:r>
+            <a:r>
+              <a:rPr lang="en-US" dirty="0"/>
+              <a:t> de </a:t>
+            </a:r>
+            <a:r>
+              <a:rPr lang="en-US" dirty="0" err="1"/>
+              <a:t>gravité</a:t>
+            </a:r>
+            <a:r>
+              <a:rPr lang="en-US" dirty="0"/>
+              <a:t>, le </a:t>
+            </a:r>
+            <a:r>
+              <a:rPr lang="en-US" dirty="0" err="1"/>
+              <a:t>nombre</a:t>
+            </a:r>
+            <a:r>
+              <a:rPr lang="en-US" dirty="0"/>
+              <a:t> </a:t>
+            </a:r>
+            <a:r>
+              <a:rPr lang="en-US" dirty="0" err="1"/>
+              <a:t>d’alertes</a:t>
+            </a:r>
+            <a:r>
+              <a:rPr lang="en-US" dirty="0"/>
+              <a:t> par ordonnance et la </a:t>
+            </a:r>
+            <a:r>
+              <a:rPr lang="en-US" dirty="0" err="1"/>
+              <a:t>cohérence</a:t>
+            </a:r>
+            <a:r>
+              <a:rPr lang="en-US" dirty="0"/>
+              <a:t>.</a:t>
+            </a:r>
+            <a:br>
+              <a:rPr lang="en-US" dirty="0">
+                <a:cs typeface="+mn-lt"/>
+              </a:rPr>
+            </a:br>
+            <a:r>
+              <a:rPr lang="en-US" dirty="0"/>
+              <a:t>Comme chacun a </a:t>
+            </a:r>
+            <a:r>
+              <a:rPr lang="en-US" dirty="0" err="1"/>
+              <a:t>écrit</a:t>
+            </a:r>
+            <a:r>
+              <a:rPr lang="en-US" dirty="0"/>
+              <a:t> </a:t>
+            </a:r>
+            <a:r>
+              <a:rPr lang="en-US" dirty="0" err="1"/>
+              <a:t>ses</a:t>
+            </a:r>
+            <a:r>
+              <a:rPr lang="en-US" dirty="0"/>
+              <a:t> </a:t>
+            </a:r>
+            <a:r>
+              <a:rPr lang="en-US" dirty="0" err="1"/>
+              <a:t>règles</a:t>
+            </a:r>
+            <a:r>
+              <a:rPr lang="en-US" dirty="0"/>
+              <a:t> et </a:t>
+            </a:r>
+            <a:r>
+              <a:rPr lang="en-US" dirty="0" err="1"/>
+              <a:t>ses</a:t>
+            </a:r>
+            <a:r>
+              <a:rPr lang="en-US" dirty="0"/>
+              <a:t> ordonnances, nous </a:t>
+            </a:r>
+            <a:r>
+              <a:rPr lang="en-US" dirty="0" err="1"/>
+              <a:t>avons</a:t>
+            </a:r>
+            <a:r>
+              <a:rPr lang="en-US" dirty="0"/>
+              <a:t> </a:t>
+            </a:r>
+            <a:r>
+              <a:rPr lang="en-US" dirty="0" err="1"/>
+              <a:t>aussi</a:t>
+            </a:r>
+            <a:r>
+              <a:rPr lang="en-US" dirty="0"/>
+              <a:t> fait </a:t>
+            </a:r>
+            <a:r>
+              <a:rPr lang="en-US" dirty="0" err="1"/>
+              <a:t>une</a:t>
+            </a:r>
+            <a:r>
+              <a:rPr lang="en-US" dirty="0"/>
+              <a:t> </a:t>
+            </a:r>
+            <a:r>
+              <a:rPr lang="en-US" dirty="0" err="1"/>
+              <a:t>évaluation</a:t>
+            </a:r>
+            <a:r>
+              <a:rPr lang="en-US" dirty="0"/>
+              <a:t> </a:t>
+            </a:r>
+            <a:r>
+              <a:rPr lang="en-US" dirty="0" err="1"/>
+              <a:t>croisée</a:t>
+            </a:r>
+            <a:r>
+              <a:rPr lang="en-US" dirty="0"/>
+              <a:t> et </a:t>
+            </a:r>
+            <a:r>
+              <a:rPr lang="en-US" dirty="0" err="1"/>
+              <a:t>testé</a:t>
+            </a:r>
+            <a:r>
+              <a:rPr lang="en-US" dirty="0"/>
+              <a:t> 5 </a:t>
+            </a:r>
+            <a:r>
+              <a:rPr lang="en-US" dirty="0" err="1"/>
+              <a:t>cas</a:t>
+            </a:r>
+            <a:r>
+              <a:rPr lang="en-US" dirty="0"/>
+              <a:t> de </a:t>
+            </a:r>
+            <a:r>
+              <a:rPr lang="en-US" dirty="0" err="1"/>
+              <a:t>généralisation</a:t>
+            </a:r>
+            <a:r>
+              <a:rPr lang="en-US" dirty="0"/>
+              <a:t>.</a:t>
+            </a:r>
+            <a:br>
+              <a:rPr lang="en-US" dirty="0">
+                <a:cs typeface="+mn-lt"/>
+              </a:rPr>
+            </a:br>
+            <a:r>
+              <a:rPr lang="en-US" dirty="0" err="1"/>
+              <a:t>Enfin</a:t>
+            </a:r>
+            <a:r>
+              <a:rPr lang="en-US" dirty="0"/>
+              <a:t>, 16 </a:t>
+            </a:r>
+            <a:r>
+              <a:rPr lang="en-US" dirty="0" err="1"/>
+              <a:t>niveaux</a:t>
+            </a:r>
+            <a:r>
+              <a:rPr lang="en-US" dirty="0"/>
+              <a:t> de </a:t>
+            </a:r>
+            <a:r>
+              <a:rPr lang="en-US" dirty="0" err="1"/>
+              <a:t>gravité</a:t>
+            </a:r>
+            <a:r>
+              <a:rPr lang="en-US" dirty="0"/>
+              <a:t> </a:t>
+            </a:r>
+            <a:r>
+              <a:rPr lang="en-US" dirty="0" err="1"/>
+              <a:t>restent</a:t>
+            </a:r>
+            <a:r>
+              <a:rPr lang="en-US" dirty="0"/>
+              <a:t> à confirmer dans le </a:t>
+            </a:r>
+            <a:r>
+              <a:rPr lang="en-US" dirty="0" err="1"/>
+              <a:t>Thésaurus</a:t>
+            </a:r>
+            <a:r>
+              <a:rPr lang="en-US" dirty="0"/>
+              <a:t>.</a:t>
+            </a:r>
+            <a:br>
+              <a:rPr lang="en-US" dirty="0">
+                <a:cs typeface="+mn-lt"/>
+              </a:rPr>
+            </a:br>
+            <a:r>
+              <a:rPr lang="en-US" dirty="0"/>
+              <a:t>Je laisse </a:t>
+            </a:r>
+            <a:r>
+              <a:rPr lang="en-US" dirty="0" err="1"/>
+              <a:t>maintenant</a:t>
+            </a:r>
+            <a:r>
+              <a:rPr lang="en-US" dirty="0"/>
+              <a:t> la parole à Aziz pour les </a:t>
+            </a:r>
+            <a:r>
+              <a:rPr lang="en-US" dirty="0" err="1"/>
+              <a:t>résultats</a:t>
+            </a:r>
+            <a:r>
+              <a:rPr lang="en-US" dirty="0"/>
+              <a:t>.</a:t>
+            </a:r>
+            <a:endParaRPr lang="fr-FR" dirty="0"/>
+          </a:p>
+          <a:p>
+            <a:endParaRPr lang="en-US" dirty="0">
+              <a:ea typeface="Calibri"/>
+              <a:cs typeface="Calibri"/>
+            </a:endParaRPr>
           </a:p>
         </p:txBody>
       </p:sp>
@@ -8119,7 +11206,7 @@
         </p:nvGraphicFramePr>
         <p:xfrm>
           <a:off x="825500" y="2266950"/>
-          <a:ext cx="10553700" cy="2474714"/>
+          <a:ext cx="10553700" cy="2474715"/>
         </p:xfrm>
         <a:graphic>
           <a:graphicData uri="http://schemas.openxmlformats.org/drawingml/2006/table">

--- a/soutenance/presentation_fusion.pptx
+++ b/soutenance/presentation_fusion.pptx
@@ -119,7 +119,7 @@
   </p:defaultTextStyle>
   <p:extLst>
     <p:ext uri="{EFAFB233-063F-42B5-8137-9DF3F51BA10A}">
-      <p15:sldGuideLst xmlns:p15="http://schemas.microsoft.com/office/powerpoint/2012/main"/>
+      <p15:sldGuideLst xmlns:p15="http://schemas.microsoft.com/office/powerpoint/2012/main" xmlns=""/>
     </p:ext>
   </p:extLst>
 </p:presentation>
@@ -214,6 +214,8 @@
           </a:lstStyle>
           <a:p>
             <a:fld id="{4FD55F9A-7859-46FE-8A5C-4C101A73E515}" type="datetimeFigureOut">
+              <a:rPr/>
+              <a:pPr/>
               <a:t>15/10/2026</a:t>
             </a:fld>
             <a:endParaRPr lang="fr-FR"/>
@@ -371,6 +373,8 @@
           </a:lstStyle>
           <a:p>
             <a:fld id="{8302A1DC-B801-49E6-8C79-C050FC97461D}" type="slidenum">
+              <a:rPr/>
+              <a:pPr/>
               <a:t>‹N°›</a:t>
             </a:fld>
             <a:endParaRPr lang="fr-FR"/>
@@ -380,7 +384,7 @@
     </p:spTree>
     <p:extLst>
       <p:ext uri="{BB962C8B-B14F-4D97-AF65-F5344CB8AC3E}">
-        <p14:creationId xmlns:p14="http://schemas.microsoft.com/office/powerpoint/2010/main" val="3372003888"/>
+        <p14:creationId xmlns:p14="http://schemas.microsoft.com/office/powerpoint/2010/main" xmlns="" val="3372003888"/>
       </p:ext>
     </p:extLst>
   </p:cSld>
@@ -656,6 +660,12 @@
               <a:rPr lang="en-US" dirty="0"/>
               <a:t>.</a:t>
             </a:r>
+            <a:r>
+              <a:rPr lang="en-US" dirty="0">
+                <a:cs typeface="+mn-lt"/>
+              </a:rPr>
+              <a:t/>
+            </a:r>
             <a:br>
               <a:rPr lang="en-US" dirty="0">
                 <a:cs typeface="+mn-lt"/>
@@ -716,6 +726,12 @@
             <a:r>
               <a:rPr lang="en-US" dirty="0"/>
               <a:t>.</a:t>
+            </a:r>
+            <a:r>
+              <a:rPr lang="en-US" dirty="0">
+                <a:cs typeface="+mn-lt"/>
+              </a:rPr>
+              <a:t/>
             </a:r>
             <a:br>
               <a:rPr lang="en-US" dirty="0">
@@ -826,6 +842,7 @@
           <a:p>
             <a:fld id="{F7021451-1387-4CA6-816F-3879F97B5CBC}" type="slidenum">
               <a:rPr lang="en-US"/>
+              <a:pPr/>
               <a:t>1</a:t>
             </a:fld>
             <a:endParaRPr lang="en-US"/>
@@ -835,7 +852,7 @@
     </p:spTree>
     <p:extLst>
       <p:ext uri="{BB962C8B-B14F-4D97-AF65-F5344CB8AC3E}">
-        <p14:creationId xmlns:p14="http://schemas.microsoft.com/office/powerpoint/2010/main" val="1024086991"/>
+        <p14:creationId xmlns:p14="http://schemas.microsoft.com/office/powerpoint/2010/main" xmlns="" val="1024086991"/>
       </p:ext>
     </p:extLst>
   </p:cSld>
@@ -890,9 +907,59 @@
           <a:lstStyle/>
           <a:p>
             <a:r>
-              <a:rPr lang="en-US" dirty="0"/>
-              <a:t>A + B. Point d'honnêteté qui distingue le projet : on a testé chaque version sur le jeu de l'autre. La version d'Imane généralisait mieux (table ATC, noms français, règles du graphe) ; celle d'Aziz couvrait des interactions manquantes (ISRS/IRSN, potassium). Le score après fusion sur les ordonnances d'Aziz est optimiste, car les règles R19-R24 ont été écrites en les connaissant.</a:t>
-            </a:r>
+              <a:rPr lang="fr-FR" dirty="0" smtClean="0"/>
+              <a:t>Avant la fusion, chaque version était meilleure sur son propre jeu de test. La version d'</a:t>
+            </a:r>
+            <a:r>
+              <a:rPr lang="fr-FR" dirty="0" err="1" smtClean="0"/>
+              <a:t>Imane</a:t>
+            </a:r>
+            <a:r>
+              <a:rPr lang="fr-FR" dirty="0" smtClean="0"/>
+              <a:t> passe de 0,83 sur son jeu à 0,76 sur celui d'Aziz.</a:t>
+            </a:r>
+          </a:p>
+          <a:p>
+            <a:r>
+              <a:rPr lang="fr-FR" dirty="0" smtClean="0"/>
+              <a:t> La version d'Aziz passe de 0,94 sur son jeu à 0,38 sur celui d'</a:t>
+            </a:r>
+            <a:r>
+              <a:rPr lang="fr-FR" dirty="0" err="1" smtClean="0"/>
+              <a:t>Imane</a:t>
+            </a:r>
+            <a:endParaRPr lang="fr-FR" dirty="0" smtClean="0"/>
+          </a:p>
+          <a:p>
+            <a:r>
+              <a:rPr lang="fr-FR" dirty="0" smtClean="0"/>
+              <a:t>.</a:t>
+            </a:r>
+          </a:p>
+          <a:p>
+            <a:r>
+              <a:rPr lang="fr-FR" dirty="0" smtClean="0"/>
+              <a:t>&gt;</a:t>
+            </a:r>
+          </a:p>
+          <a:p>
+            <a:r>
+              <a:rPr lang="fr-FR" dirty="0" smtClean="0"/>
+              <a:t> La leçon est claire : lorsqu'une même personne construit les règles et les données de test, le score peut être optimiste.</a:t>
+            </a:r>
+          </a:p>
+          <a:p>
+            <a:r>
+              <a:rPr lang="fr-FR" dirty="0" smtClean="0"/>
+              <a:t>&gt;</a:t>
+            </a:r>
+          </a:p>
+          <a:p>
+            <a:r>
+              <a:rPr lang="fr-FR" dirty="0" smtClean="0"/>
+              <a:t> Après fusion, les règles R19 à R24 ont été ajoutées après consultation des ordonnances d'Aziz. Le F1 de 0,98 sur ces ordonnances reste donc optimiste. Nous l'indiquons explicitement plutôt que de présenter ce score comme une validation indépendante.</a:t>
+            </a:r>
+            <a:endParaRPr lang="en-US" dirty="0"/>
           </a:p>
         </p:txBody>
       </p:sp>
@@ -913,6 +980,7 @@
           <a:p>
             <a:fld id="{F7021451-1387-4CA6-816F-3879F97B5CBC}" type="slidenum">
               <a:rPr lang="en-US"/>
+              <a:pPr/>
               <a:t>10</a:t>
             </a:fld>
             <a:endParaRPr lang="en-US"/>
@@ -922,7 +990,7 @@
     </p:spTree>
     <p:extLst>
       <p:ext uri="{BB962C8B-B14F-4D97-AF65-F5344CB8AC3E}">
-        <p14:creationId xmlns:p14="http://schemas.microsoft.com/office/powerpoint/2010/main" val="1024086991"/>
+        <p14:creationId xmlns:p14="http://schemas.microsoft.com/office/powerpoint/2010/main" xmlns="" val="1024086991"/>
       </p:ext>
     </p:extLst>
   </p:cSld>
@@ -977,9 +1045,129 @@
           <a:lstStyle/>
           <a:p>
             <a:r>
-              <a:rPr lang="en-US" dirty="0"/>
-              <a:t>B (Aziz). Les oublis viennent du compromis anti-fatigue ou de règles absentes ; les fausses alertes viennent du graphe, qui ne connaît ni les doses ni l'intensité des effets. Relever le filtre retrouverait 3 oublis mais ajouterait des dizaines de fausses alertes.</a:t>
-            </a:r>
+              <a:rPr lang="fr-FR" dirty="0" smtClean="0"/>
+              <a:t>Nous attribuons les huit erreurs à une brique précise. Trois oublis viennent du filtre </a:t>
+            </a:r>
+            <a:r>
+              <a:rPr lang="fr-FR" dirty="0" err="1" smtClean="0"/>
+              <a:t>anti-fatigue</a:t>
+            </a:r>
+            <a:r>
+              <a:rPr lang="fr-FR" dirty="0" smtClean="0"/>
+              <a:t>. Par exemple, le graphe relie allopurinol et </a:t>
+            </a:r>
+            <a:r>
+              <a:rPr lang="fr-FR" dirty="0" err="1" smtClean="0"/>
+              <a:t>azathioprine</a:t>
+            </a:r>
+            <a:r>
+              <a:rPr lang="fr-FR" dirty="0" smtClean="0"/>
+              <a:t> à une cible commune, XDH, mais le signal de niveau 1 est masqué.</a:t>
+            </a:r>
+          </a:p>
+          <a:p>
+            <a:endParaRPr lang="fr-FR" dirty="0" smtClean="0"/>
+          </a:p>
+          <a:p>
+            <a:pPr>
+              <a:buFont typeface="Wingdings"/>
+              <a:buChar char="Ø"/>
+            </a:pPr>
+            <a:r>
+              <a:rPr lang="fr-FR" dirty="0" smtClean="0"/>
+              <a:t>Trois autres oublis viennent de règles manquantes : </a:t>
+            </a:r>
+            <a:r>
+              <a:rPr lang="fr-FR" dirty="0" err="1" smtClean="0"/>
+              <a:t>digoxine</a:t>
+            </a:r>
+            <a:r>
+              <a:rPr lang="fr-FR" dirty="0" smtClean="0"/>
+              <a:t> avec furosémide et </a:t>
+            </a:r>
+            <a:r>
+              <a:rPr lang="fr-FR" dirty="0" err="1" smtClean="0"/>
+              <a:t>simvastatine</a:t>
+            </a:r>
+            <a:r>
+              <a:rPr lang="fr-FR" dirty="0" smtClean="0"/>
+              <a:t> avec </a:t>
+            </a:r>
+            <a:r>
+              <a:rPr lang="fr-FR" dirty="0" err="1" smtClean="0"/>
+              <a:t>amlodipine</a:t>
+            </a:r>
+            <a:r>
+              <a:rPr lang="fr-FR" dirty="0" smtClean="0"/>
+              <a:t> ne sont pas couverts par les règles disponibles ni par le graphe.&gt;</a:t>
+            </a:r>
+          </a:p>
+          <a:p>
+            <a:pPr>
+              <a:buFont typeface="Wingdings"/>
+              <a:buChar char="Ø"/>
+            </a:pPr>
+            <a:endParaRPr lang="fr-FR" dirty="0" smtClean="0"/>
+          </a:p>
+          <a:p>
+            <a:pPr>
+              <a:buFont typeface="Wingdings"/>
+              <a:buChar char="Ø"/>
+            </a:pPr>
+            <a:r>
+              <a:rPr lang="fr-FR" dirty="0" smtClean="0"/>
+              <a:t> Nous avons aussi deux fausses alertes. La première vient d'une classe trop large : le graphe classe l'aspirine comme AINS, sans considérer son usage à dose </a:t>
+            </a:r>
+            <a:r>
+              <a:rPr lang="fr-FR" dirty="0" err="1" smtClean="0"/>
+              <a:t>antiagrégante</a:t>
+            </a:r>
+            <a:r>
+              <a:rPr lang="fr-FR" dirty="0" smtClean="0"/>
+              <a:t>. </a:t>
+            </a:r>
+          </a:p>
+          <a:p>
+            <a:pPr>
+              <a:buFont typeface="Wingdings"/>
+              <a:buChar char="Ø"/>
+            </a:pPr>
+            <a:endParaRPr lang="fr-FR" dirty="0" smtClean="0"/>
+          </a:p>
+          <a:p>
+            <a:pPr>
+              <a:buFont typeface="Wingdings"/>
+              <a:buChar char="Ø"/>
+            </a:pPr>
+            <a:r>
+              <a:rPr lang="fr-FR" dirty="0" smtClean="0"/>
+              <a:t>La seconde vient de G1 : le graphe ne code pas la force de l'inhibition de l'</a:t>
+            </a:r>
+            <a:r>
+              <a:rPr lang="fr-FR" dirty="0" err="1" smtClean="0"/>
+              <a:t>oméprazole</a:t>
+            </a:r>
+            <a:r>
+              <a:rPr lang="fr-FR" dirty="0" smtClean="0"/>
+              <a:t> sur la </a:t>
+            </a:r>
+            <a:r>
+              <a:rPr lang="fr-FR" dirty="0" err="1" smtClean="0"/>
+              <a:t>warfarine</a:t>
+            </a:r>
+            <a:r>
+              <a:rPr lang="fr-FR" dirty="0" smtClean="0"/>
+              <a:t>.&gt; L'absence d'arête dans </a:t>
+            </a:r>
+            <a:r>
+              <a:rPr lang="fr-FR" dirty="0" err="1" smtClean="0"/>
+              <a:t>Hetionet</a:t>
+            </a:r>
+            <a:r>
+              <a:rPr lang="fr-FR" dirty="0" smtClean="0"/>
+              <a:t> ne prouve donc jamais l'absence de risque clinique.</a:t>
+            </a:r>
+            <a:endParaRPr lang="en-US" dirty="0"/>
           </a:p>
         </p:txBody>
       </p:sp>
@@ -1000,6 +1188,7 @@
           <a:p>
             <a:fld id="{F7021451-1387-4CA6-816F-3879F97B5CBC}" type="slidenum">
               <a:rPr lang="en-US"/>
+              <a:pPr/>
               <a:t>11</a:t>
             </a:fld>
             <a:endParaRPr lang="en-US"/>
@@ -1009,7 +1198,7 @@
     </p:spTree>
     <p:extLst>
       <p:ext uri="{BB962C8B-B14F-4D97-AF65-F5344CB8AC3E}">
-        <p14:creationId xmlns:p14="http://schemas.microsoft.com/office/powerpoint/2010/main" val="1024086991"/>
+        <p14:creationId xmlns:p14="http://schemas.microsoft.com/office/powerpoint/2010/main" xmlns="" val="1024086991"/>
       </p:ext>
     </p:extLst>
   </p:cSld>
@@ -1064,9 +1253,36 @@
           <a:lstStyle/>
           <a:p>
             <a:r>
-              <a:rPr lang="en-US" dirty="0"/>
-              <a:t>A (Imane). Même logique que la séance 3 sur la somme MNIST : on somme les mondes où la requête est vraie. Limite : le « ou » bruité suppose les règles indépendantes, ce qui est faux quand deux règles décrivent le même mécanisme (R04 et G1). Les poids devraient être appris sur un jeu de validation.</a:t>
-            </a:r>
+              <a:rPr lang="fr-FR" dirty="0" smtClean="0"/>
+              <a:t>En bonus, nous avons traduit les règles en une version pondérée avec </a:t>
+            </a:r>
+            <a:r>
+              <a:rPr lang="fr-FR" dirty="0" err="1" smtClean="0"/>
+              <a:t>ProbLog</a:t>
+            </a:r>
+            <a:r>
+              <a:rPr lang="fr-FR" dirty="0" smtClean="0"/>
+              <a:t>. L'idée est de classer les alertes par probabilité, et non de remplacer les règles cliniques par une décision opaque.&gt;</a:t>
+            </a:r>
+          </a:p>
+          <a:p>
+            <a:endParaRPr lang="fr-FR" dirty="0" smtClean="0"/>
+          </a:p>
+          <a:p>
+            <a:r>
+              <a:rPr lang="fr-FR" dirty="0" smtClean="0"/>
+              <a:t> Sur 152 paires, cette version obtient une AUC de 0,93 et une erreur de calibration de 0,07. Au seuil de 0,5, elle conserve 47 des 48 vraies alertes.</a:t>
+            </a:r>
+          </a:p>
+          <a:p>
+            <a:endParaRPr lang="fr-FR" dirty="0" smtClean="0"/>
+          </a:p>
+          <a:p>
+            <a:r>
+              <a:rPr lang="fr-FR" dirty="0" smtClean="0"/>
+              <a:t>&gt; Les poids ont été fixés avant l'évaluation. La pondération sert principalement à ordonner les alertes ; la tranche de probabilité entre 0,2 et 0,4 reste surestimée.</a:t>
+            </a:r>
+            <a:endParaRPr lang="en-US" dirty="0"/>
           </a:p>
         </p:txBody>
       </p:sp>
@@ -1087,6 +1303,7 @@
           <a:p>
             <a:fld id="{F7021451-1387-4CA6-816F-3879F97B5CBC}" type="slidenum">
               <a:rPr lang="en-US"/>
+              <a:pPr/>
               <a:t>12</a:t>
             </a:fld>
             <a:endParaRPr lang="en-US"/>
@@ -1096,7 +1313,7 @@
     </p:spTree>
     <p:extLst>
       <p:ext uri="{BB962C8B-B14F-4D97-AF65-F5344CB8AC3E}">
-        <p14:creationId xmlns:p14="http://schemas.microsoft.com/office/powerpoint/2010/main" val="1024086991"/>
+        <p14:creationId xmlns:p14="http://schemas.microsoft.com/office/powerpoint/2010/main" xmlns="" val="1024086991"/>
       </p:ext>
     </p:extLst>
   </p:cSld>
@@ -1151,9 +1368,59 @@
           <a:lstStyle/>
           <a:p>
             <a:r>
-              <a:rPr lang="en-US" dirty="0"/>
-              <a:t>A + B. Prototype pédagogique : il montre la faisabilité, pas une performance clinique. Questions probables : pourquoi pas un LLM seul ? (pas de preuve reproductible ; la référence LLM est prévue dans le code mais non évaluée) ; les résultats sont-ils cliniquement valides ? (non, petit jeu de test construit par le binôme).</a:t>
-            </a:r>
+              <a:rPr lang="fr-FR" dirty="0" smtClean="0"/>
+              <a:t>Notre première limite est la couverture : </a:t>
+            </a:r>
+            <a:r>
+              <a:rPr lang="fr-FR" dirty="0" err="1" smtClean="0"/>
+              <a:t>Hetionet</a:t>
+            </a:r>
+            <a:r>
+              <a:rPr lang="fr-FR" dirty="0" smtClean="0"/>
+              <a:t> date de 2017, il est incomplet et statique. Le système ne modélise ni les doses, ni les données patient, ni l'intensité réelle des inhibiteurs enzymatiques.&gt; La vérité terrain a été construite par le binôme. Seize niveaux restent à confirmer, et certaines règles ainsi que le filtre ont été ajoutés après l'analyse du jeu de test. Les résultats ne constituent donc pas une validation clinique.&gt;</a:t>
+            </a:r>
+          </a:p>
+          <a:p>
+            <a:endParaRPr lang="fr-FR" dirty="0" smtClean="0"/>
+          </a:p>
+          <a:p>
+            <a:r>
+              <a:rPr lang="fr-FR" dirty="0" smtClean="0"/>
+              <a:t>La suite consiste à faire annoter un jeu de test indépendant par un pharmacien, à intégrer les doses et la force des inhibiteurs, puis à apprendre ou </a:t>
+            </a:r>
+            <a:r>
+              <a:rPr lang="fr-FR" dirty="0" err="1" smtClean="0"/>
+              <a:t>recalibrer</a:t>
+            </a:r>
+            <a:r>
+              <a:rPr lang="fr-FR" dirty="0" smtClean="0"/>
+              <a:t> les poids </a:t>
+            </a:r>
+            <a:r>
+              <a:rPr lang="fr-FR" dirty="0" err="1" smtClean="0"/>
+              <a:t>ProbLog</a:t>
+            </a:r>
+            <a:r>
+              <a:rPr lang="fr-FR" dirty="0" smtClean="0"/>
+              <a:t>. Les </a:t>
+            </a:r>
+            <a:r>
+              <a:rPr lang="fr-FR" dirty="0" err="1" smtClean="0"/>
+              <a:t>embeddings</a:t>
+            </a:r>
+            <a:r>
+              <a:rPr lang="fr-FR" dirty="0" smtClean="0"/>
+              <a:t>, comme </a:t>
+            </a:r>
+            <a:r>
+              <a:rPr lang="fr-FR" dirty="0" err="1" smtClean="0"/>
+              <a:t>TransE</a:t>
+            </a:r>
+            <a:r>
+              <a:rPr lang="fr-FR" dirty="0" smtClean="0"/>
+              <a:t>, resteraient des générateurs d'hypothèses et non une recommandation clinique directe.</a:t>
+            </a:r>
+            <a:endParaRPr lang="en-US" dirty="0"/>
           </a:p>
         </p:txBody>
       </p:sp>
@@ -1174,6 +1441,7 @@
           <a:p>
             <a:fld id="{F7021451-1387-4CA6-816F-3879F97B5CBC}" type="slidenum">
               <a:rPr lang="en-US"/>
+              <a:pPr/>
               <a:t>13</a:t>
             </a:fld>
             <a:endParaRPr lang="en-US"/>
@@ -1183,7 +1451,7 @@
     </p:spTree>
     <p:extLst>
       <p:ext uri="{BB962C8B-B14F-4D97-AF65-F5344CB8AC3E}">
-        <p14:creationId xmlns:p14="http://schemas.microsoft.com/office/powerpoint/2010/main" val="1024086991"/>
+        <p14:creationId xmlns:p14="http://schemas.microsoft.com/office/powerpoint/2010/main" xmlns="" val="1024086991"/>
       </p:ext>
     </p:extLst>
   </p:cSld>
@@ -1238,235 +1506,40 @@
           <a:lstStyle/>
           <a:p>
             <a:r>
-              <a:rPr lang="en-US" b="1" dirty="0"/>
-              <a:t>Début :</a:t>
-            </a:r>
-            <a:r>
-              <a:rPr lang="en-US" dirty="0"/>
-              <a:t> Pour </a:t>
-            </a:r>
-            <a:r>
-              <a:rPr lang="en-US" dirty="0" err="1"/>
-              <a:t>conclure</a:t>
-            </a:r>
-            <a:r>
-              <a:rPr lang="en-US" dirty="0"/>
-              <a:t>, </a:t>
-            </a:r>
-            <a:r>
-              <a:rPr lang="en-US" dirty="0" err="1"/>
-              <a:t>notre</a:t>
-            </a:r>
-            <a:r>
-              <a:rPr lang="en-US" dirty="0"/>
-              <a:t> apport principal est de combiner deux sources de </a:t>
-            </a:r>
-            <a:r>
-              <a:rPr lang="en-US" dirty="0" err="1"/>
-              <a:t>connaissance</a:t>
-            </a:r>
-            <a:r>
-              <a:rPr lang="en-US" dirty="0"/>
-              <a:t> : les </a:t>
-            </a:r>
-            <a:r>
-              <a:rPr lang="en-US" dirty="0" err="1"/>
-              <a:t>règles</a:t>
-            </a:r>
-            <a:r>
-              <a:rPr lang="en-US" dirty="0"/>
-              <a:t> </a:t>
-            </a:r>
-            <a:r>
-              <a:rPr lang="en-US" dirty="0" err="1"/>
-              <a:t>donnent</a:t>
-            </a:r>
-            <a:r>
-              <a:rPr lang="en-US" dirty="0"/>
-              <a:t> la </a:t>
-            </a:r>
-            <a:r>
-              <a:rPr lang="en-US" dirty="0" err="1"/>
-              <a:t>gravité</a:t>
-            </a:r>
-            <a:r>
-              <a:rPr lang="en-US" dirty="0"/>
-              <a:t> et la source, et le </a:t>
-            </a:r>
-            <a:r>
-              <a:rPr lang="en-US" dirty="0" err="1"/>
-              <a:t>graphe</a:t>
-            </a:r>
-            <a:r>
-              <a:rPr lang="en-US" dirty="0"/>
-              <a:t> </a:t>
-            </a:r>
-            <a:r>
-              <a:rPr lang="en-US" dirty="0" err="1"/>
-              <a:t>permet</a:t>
-            </a:r>
-            <a:r>
-              <a:rPr lang="en-US" dirty="0"/>
-              <a:t> de </a:t>
-            </a:r>
-            <a:r>
-              <a:rPr lang="en-US" dirty="0" err="1"/>
-              <a:t>généraliser</a:t>
-            </a:r>
-            <a:r>
-              <a:rPr lang="en-US" dirty="0"/>
-              <a:t> au-</a:t>
-            </a:r>
-            <a:r>
-              <a:rPr lang="en-US" dirty="0" err="1"/>
-              <a:t>delà</a:t>
-            </a:r>
-            <a:r>
-              <a:rPr lang="en-US" dirty="0"/>
-              <a:t> </a:t>
-            </a:r>
-            <a:r>
-              <a:rPr lang="en-US" dirty="0" err="1"/>
-              <a:t>d’une</a:t>
-            </a:r>
-            <a:r>
-              <a:rPr lang="en-US" dirty="0"/>
-              <a:t> simple </a:t>
-            </a:r>
-            <a:r>
-              <a:rPr lang="en-US" dirty="0" err="1"/>
-              <a:t>liste</a:t>
-            </a:r>
-            <a:r>
-              <a:rPr lang="en-US" dirty="0"/>
-              <a:t>.</a:t>
-            </a:r>
-            <a:br>
-              <a:rPr lang="en-US" dirty="0">
-                <a:cs typeface="+mn-lt"/>
-              </a:rPr>
-            </a:br>
-            <a:r>
-              <a:rPr lang="en-US" dirty="0"/>
-              <a:t>(Aziz </a:t>
-            </a:r>
-            <a:r>
-              <a:rPr lang="en-US" dirty="0" err="1"/>
-              <a:t>donne</a:t>
-            </a:r>
-            <a:r>
-              <a:rPr lang="en-US" dirty="0"/>
-              <a:t> les chiffres.)</a:t>
-            </a:r>
-            <a:br>
-              <a:rPr lang="en-US" dirty="0">
-                <a:cs typeface="+mn-lt"/>
-              </a:rPr>
-            </a:br>
-            <a:r>
-              <a:rPr lang="en-US" dirty="0"/>
-              <a:t>Fin : Nous </a:t>
-            </a:r>
-            <a:r>
-              <a:rPr lang="en-US" dirty="0" err="1"/>
-              <a:t>insistons</a:t>
-            </a:r>
-            <a:r>
-              <a:rPr lang="en-US" dirty="0"/>
-              <a:t> sur le fait </a:t>
-            </a:r>
-            <a:r>
-              <a:rPr lang="en-US" dirty="0" err="1"/>
-              <a:t>que</a:t>
-            </a:r>
-            <a:r>
-              <a:rPr lang="en-US" dirty="0"/>
-              <a:t> </a:t>
-            </a:r>
-            <a:r>
-              <a:rPr lang="en-US" dirty="0" err="1"/>
-              <a:t>c’est</a:t>
-            </a:r>
-            <a:r>
-              <a:rPr lang="en-US" dirty="0"/>
-              <a:t> un prototype </a:t>
-            </a:r>
-            <a:r>
-              <a:rPr lang="en-US" dirty="0" err="1"/>
-              <a:t>pédagogique</a:t>
-            </a:r>
-            <a:r>
-              <a:rPr lang="en-US" dirty="0"/>
-              <a:t> : </a:t>
-            </a:r>
-            <a:r>
-              <a:rPr lang="en-US" dirty="0" err="1"/>
-              <a:t>une</a:t>
-            </a:r>
-            <a:r>
-              <a:rPr lang="en-US" dirty="0"/>
-              <a:t> validation par un </a:t>
-            </a:r>
-            <a:r>
-              <a:rPr lang="en-US" dirty="0" err="1"/>
-              <a:t>professionnel</a:t>
-            </a:r>
-            <a:r>
-              <a:rPr lang="en-US" dirty="0"/>
-              <a:t> de santé </a:t>
-            </a:r>
-            <a:r>
-              <a:rPr lang="en-US" dirty="0" err="1"/>
-              <a:t>reste</a:t>
-            </a:r>
-            <a:r>
-              <a:rPr lang="en-US" dirty="0"/>
-              <a:t> indispensable. Merci pour </a:t>
-            </a:r>
-            <a:r>
-              <a:rPr lang="en-US" dirty="0" err="1"/>
-              <a:t>votre</a:t>
-            </a:r>
-            <a:r>
-              <a:rPr lang="en-US" dirty="0"/>
-              <a:t> attention, nous </a:t>
-            </a:r>
-            <a:r>
-              <a:rPr lang="en-US" dirty="0" err="1"/>
-              <a:t>sommes</a:t>
-            </a:r>
-            <a:r>
-              <a:rPr lang="en-US" dirty="0"/>
-              <a:t> </a:t>
-            </a:r>
-            <a:r>
-              <a:rPr lang="en-US" dirty="0" err="1"/>
-              <a:t>prêts</a:t>
-            </a:r>
-            <a:r>
-              <a:rPr lang="en-US" dirty="0"/>
-              <a:t> à </a:t>
-            </a:r>
-            <a:r>
-              <a:rPr lang="en-US" dirty="0" err="1"/>
-              <a:t>répondre</a:t>
-            </a:r>
-            <a:r>
-              <a:rPr lang="en-US" dirty="0"/>
-              <a:t> à </a:t>
-            </a:r>
-            <a:r>
-              <a:rPr lang="en-US" dirty="0" err="1"/>
-              <a:t>vos</a:t>
-            </a:r>
-            <a:r>
-              <a:rPr lang="en-US" dirty="0"/>
-              <a:t> questions.</a:t>
+              <a:rPr lang="fr-FR" b="1" dirty="0" err="1" smtClean="0"/>
+              <a:t>Imen</a:t>
+            </a:r>
+            <a:r>
+              <a:rPr lang="fr-FR" b="1" dirty="0" smtClean="0"/>
+              <a:t> :**&gt; Notre apport principal est de combiner les règles et le graphe : les règles donnent une gravité et une source explicites, tandis que le graphe aide à généraliser au-delà d'une liste de paires figée.</a:t>
+            </a:r>
+          </a:p>
+          <a:p>
+            <a:endParaRPr lang="fr-FR" b="1" dirty="0" smtClean="0"/>
+          </a:p>
+          <a:p>
+            <a:r>
+              <a:rPr lang="fr-FR" b="1" dirty="0" smtClean="0"/>
+              <a:t>**AZIZ**&gt; Sur notre jeu fusionné, cette approche atteint un F1 de 0,92 contre 0,56 pour la référence, avec 1,25 alerte par ordonnance et une explication pour chaque alerte.</a:t>
+            </a:r>
+          </a:p>
+          <a:p>
+            <a:endParaRPr lang="fr-FR" b="1" dirty="0" smtClean="0"/>
+          </a:p>
+          <a:p>
+            <a:r>
+              <a:rPr lang="fr-FR" b="1" dirty="0" smtClean="0"/>
+              <a:t>**</a:t>
+            </a:r>
+            <a:r>
+              <a:rPr lang="fr-FR" b="1" smtClean="0"/>
+              <a:t>Imen**&gt; </a:t>
+            </a:r>
+            <a:r>
+              <a:rPr lang="fr-FR" b="1" dirty="0" smtClean="0"/>
+              <a:t>Nous insistons néanmoins sur le fait qu'il s'agit d'un prototype pédagogique. Une validation indépendante par un professionnel de santé reste indispensable.</a:t>
             </a:r>
             <a:endParaRPr lang="fr-FR" dirty="0"/>
-          </a:p>
-          <a:p>
-            <a:endParaRPr lang="fr-FR"/>
           </a:p>
         </p:txBody>
       </p:sp>
@@ -1487,6 +1560,7 @@
           <a:p>
             <a:fld id="{F7021451-1387-4CA6-816F-3879F97B5CBC}" type="slidenum">
               <a:rPr lang="en-US"/>
+              <a:pPr/>
               <a:t>14</a:t>
             </a:fld>
             <a:endParaRPr lang="en-US"/>
@@ -1496,7 +1570,7 @@
     </p:spTree>
     <p:extLst>
       <p:ext uri="{BB962C8B-B14F-4D97-AF65-F5344CB8AC3E}">
-        <p14:creationId xmlns:p14="http://schemas.microsoft.com/office/powerpoint/2010/main" val="1024086991"/>
+        <p14:creationId xmlns:p14="http://schemas.microsoft.com/office/powerpoint/2010/main" xmlns="" val="1024086991"/>
       </p:ext>
     </p:extLst>
   </p:cSld>
@@ -1650,6 +1724,12 @@
               <a:rPr lang="en-US" dirty="0"/>
               <a:t>.</a:t>
             </a:r>
+            <a:r>
+              <a:rPr lang="en-US" dirty="0">
+                <a:cs typeface="+mn-lt"/>
+              </a:rPr>
+              <a:t/>
+            </a:r>
             <a:br>
               <a:rPr lang="en-US" dirty="0">
                 <a:cs typeface="+mn-lt"/>
@@ -1795,6 +1875,12 @@
               <a:rPr lang="en-US" dirty="0"/>
               <a:t>.</a:t>
             </a:r>
+            <a:r>
+              <a:rPr lang="en-US" dirty="0">
+                <a:cs typeface="+mn-lt"/>
+              </a:rPr>
+              <a:t/>
+            </a:r>
             <a:br>
               <a:rPr lang="en-US" dirty="0">
                 <a:cs typeface="+mn-lt"/>
@@ -1900,6 +1986,12 @@
               <a:rPr lang="en-US" dirty="0"/>
               <a:t> les plus graves.</a:t>
             </a:r>
+            <a:r>
+              <a:rPr lang="en-US" dirty="0">
+                <a:cs typeface="+mn-lt"/>
+              </a:rPr>
+              <a:t/>
+            </a:r>
             <a:br>
               <a:rPr lang="en-US" dirty="0">
                 <a:cs typeface="+mn-lt"/>
@@ -1960,7 +2052,7 @@
             <a:endParaRPr lang="fr-FR" dirty="0"/>
           </a:p>
           <a:p>
-            <a:endParaRPr lang="fr-FR"/>
+            <a:endParaRPr lang="fr-FR" dirty="0"/>
           </a:p>
         </p:txBody>
       </p:sp>
@@ -1981,6 +2073,7 @@
           <a:p>
             <a:fld id="{F7021451-1387-4CA6-816F-3879F97B5CBC}" type="slidenum">
               <a:rPr lang="en-US"/>
+              <a:pPr/>
               <a:t>2</a:t>
             </a:fld>
             <a:endParaRPr lang="en-US"/>
@@ -1990,7 +2083,7 @@
     </p:spTree>
     <p:extLst>
       <p:ext uri="{BB962C8B-B14F-4D97-AF65-F5344CB8AC3E}">
-        <p14:creationId xmlns:p14="http://schemas.microsoft.com/office/powerpoint/2010/main" val="1024086991"/>
+        <p14:creationId xmlns:p14="http://schemas.microsoft.com/office/powerpoint/2010/main" xmlns="" val="1024086991"/>
       </p:ext>
     </p:extLst>
   </p:cSld>
@@ -2188,6 +2281,12 @@
               <a:rPr lang="en-US" dirty="0"/>
               <a:t>.</a:t>
             </a:r>
+            <a:r>
+              <a:rPr lang="en-US" dirty="0">
+                <a:cs typeface="+mn-lt"/>
+              </a:rPr>
+              <a:t/>
+            </a:r>
             <a:br>
               <a:rPr lang="en-US" dirty="0">
                 <a:cs typeface="+mn-lt"/>
@@ -2357,6 +2456,12 @@
               <a:rPr lang="en-US" dirty="0"/>
               <a:t>.</a:t>
             </a:r>
+            <a:r>
+              <a:rPr lang="en-US" dirty="0">
+                <a:cs typeface="+mn-lt"/>
+              </a:rPr>
+              <a:t/>
+            </a:r>
             <a:br>
               <a:rPr lang="en-US" dirty="0">
                 <a:cs typeface="+mn-lt"/>
@@ -2517,6 +2622,12 @@
             <a:r>
               <a:rPr lang="en-US" dirty="0"/>
               <a:t>.</a:t>
+            </a:r>
+            <a:r>
+              <a:rPr lang="en-US" dirty="0">
+                <a:cs typeface="+mn-lt"/>
+              </a:rPr>
+              <a:t/>
             </a:r>
             <a:br>
               <a:rPr lang="en-US" dirty="0">
@@ -2599,6 +2710,7 @@
           <a:p>
             <a:fld id="{F7021451-1387-4CA6-816F-3879F97B5CBC}" type="slidenum">
               <a:rPr lang="en-US"/>
+              <a:pPr/>
               <a:t>3</a:t>
             </a:fld>
             <a:endParaRPr lang="en-US"/>
@@ -2608,7 +2720,7 @@
     </p:spTree>
     <p:extLst>
       <p:ext uri="{BB962C8B-B14F-4D97-AF65-F5344CB8AC3E}">
-        <p14:creationId xmlns:p14="http://schemas.microsoft.com/office/powerpoint/2010/main" val="1024086991"/>
+        <p14:creationId xmlns:p14="http://schemas.microsoft.com/office/powerpoint/2010/main" xmlns="" val="1024086991"/>
       </p:ext>
     </p:extLst>
   </p:cSld>
@@ -2686,6 +2798,12 @@
               <a:rPr lang="en-US" dirty="0"/>
               <a:t>.</a:t>
             </a:r>
+            <a:r>
+              <a:rPr lang="en-US" dirty="0">
+                <a:cs typeface="+mn-lt"/>
+              </a:rPr>
+              <a:t/>
+            </a:r>
             <a:br>
               <a:rPr lang="en-US" dirty="0">
                 <a:cs typeface="+mn-lt"/>
@@ -2767,6 +2885,12 @@
               <a:rPr lang="en-US" dirty="0"/>
               <a:t>.</a:t>
             </a:r>
+            <a:r>
+              <a:rPr lang="en-US" dirty="0">
+                <a:cs typeface="+mn-lt"/>
+              </a:rPr>
+              <a:t/>
+            </a:r>
             <a:br>
               <a:rPr lang="en-US" dirty="0">
                 <a:cs typeface="+mn-lt"/>
@@ -2872,6 +2996,12 @@
               <a:rPr lang="en-US" dirty="0"/>
               <a:t>.</a:t>
             </a:r>
+            <a:r>
+              <a:rPr lang="en-US" dirty="0">
+                <a:cs typeface="+mn-lt"/>
+              </a:rPr>
+              <a:t/>
+            </a:r>
             <a:br>
               <a:rPr lang="en-US" dirty="0">
                 <a:cs typeface="+mn-lt"/>
@@ -2992,6 +3122,12 @@
             <a:r>
               <a:rPr lang="en-US" dirty="0"/>
               <a:t> 2.</a:t>
+            </a:r>
+            <a:r>
+              <a:rPr lang="en-US" dirty="0">
+                <a:cs typeface="+mn-lt"/>
+              </a:rPr>
+              <a:t/>
             </a:r>
             <a:br>
               <a:rPr lang="en-US" dirty="0">
@@ -3130,6 +3266,7 @@
           <a:p>
             <a:fld id="{F7021451-1387-4CA6-816F-3879F97B5CBC}" type="slidenum">
               <a:rPr lang="en-US"/>
+              <a:pPr/>
               <a:t>4</a:t>
             </a:fld>
             <a:endParaRPr lang="en-US"/>
@@ -3139,7 +3276,7 @@
     </p:spTree>
     <p:extLst>
       <p:ext uri="{BB962C8B-B14F-4D97-AF65-F5344CB8AC3E}">
-        <p14:creationId xmlns:p14="http://schemas.microsoft.com/office/powerpoint/2010/main" val="1024086991"/>
+        <p14:creationId xmlns:p14="http://schemas.microsoft.com/office/powerpoint/2010/main" xmlns="" val="1024086991"/>
       </p:ext>
     </p:extLst>
   </p:cSld>
@@ -3241,6 +3378,12 @@
               <a:rPr lang="en-US" dirty="0"/>
               <a:t>.</a:t>
             </a:r>
+            <a:r>
+              <a:rPr lang="en-US" dirty="0">
+                <a:cs typeface="+mn-lt"/>
+              </a:rPr>
+              <a:t/>
+            </a:r>
             <a:br>
               <a:rPr lang="en-US" dirty="0">
                 <a:cs typeface="+mn-lt"/>
@@ -3338,6 +3481,12 @@
               <a:rPr lang="en-US" dirty="0"/>
               <a:t> avec le Viagra.</a:t>
             </a:r>
+            <a:r>
+              <a:rPr lang="en-US" dirty="0">
+                <a:cs typeface="+mn-lt"/>
+              </a:rPr>
+              <a:t/>
+            </a:r>
             <a:br>
               <a:rPr lang="en-US" dirty="0">
                 <a:cs typeface="+mn-lt"/>
@@ -3403,6 +3552,12 @@
               <a:rPr lang="en-US" dirty="0"/>
               <a:t>.</a:t>
             </a:r>
+            <a:r>
+              <a:rPr lang="en-US" dirty="0">
+                <a:cs typeface="+mn-lt"/>
+              </a:rPr>
+              <a:t/>
+            </a:r>
             <a:br>
               <a:rPr lang="en-US" dirty="0">
                 <a:cs typeface="+mn-lt"/>
@@ -3603,6 +3758,12 @@
             <a:r>
               <a:rPr lang="en-US" dirty="0"/>
               <a:t>.</a:t>
+            </a:r>
+            <a:r>
+              <a:rPr lang="en-US" dirty="0">
+                <a:cs typeface="+mn-lt"/>
+              </a:rPr>
+              <a:t/>
             </a:r>
             <a:br>
               <a:rPr lang="en-US" dirty="0">
@@ -3681,6 +3842,7 @@
           <a:p>
             <a:fld id="{F7021451-1387-4CA6-816F-3879F97B5CBC}" type="slidenum">
               <a:rPr lang="en-US"/>
+              <a:pPr/>
               <a:t>5</a:t>
             </a:fld>
             <a:endParaRPr lang="en-US"/>
@@ -3690,7 +3852,7 @@
     </p:spTree>
     <p:extLst>
       <p:ext uri="{BB962C8B-B14F-4D97-AF65-F5344CB8AC3E}">
-        <p14:creationId xmlns:p14="http://schemas.microsoft.com/office/powerpoint/2010/main" val="1024086991"/>
+        <p14:creationId xmlns:p14="http://schemas.microsoft.com/office/powerpoint/2010/main" xmlns="" val="1024086991"/>
       </p:ext>
     </p:extLst>
   </p:cSld>
@@ -4113,6 +4275,7 @@
           <a:p>
             <a:fld id="{F7021451-1387-4CA6-816F-3879F97B5CBC}" type="slidenum">
               <a:rPr lang="en-US"/>
+              <a:pPr/>
               <a:t>6</a:t>
             </a:fld>
             <a:endParaRPr lang="en-US"/>
@@ -4122,7 +4285,7 @@
     </p:spTree>
     <p:extLst>
       <p:ext uri="{BB962C8B-B14F-4D97-AF65-F5344CB8AC3E}">
-        <p14:creationId xmlns:p14="http://schemas.microsoft.com/office/powerpoint/2010/main" val="1024086991"/>
+        <p14:creationId xmlns:p14="http://schemas.microsoft.com/office/powerpoint/2010/main" xmlns="" val="1024086991"/>
       </p:ext>
     </p:extLst>
   </p:cSld>
@@ -4236,6 +4399,12 @@
               <a:rPr lang="en-US" dirty="0"/>
               <a:t>.</a:t>
             </a:r>
+            <a:r>
+              <a:rPr lang="en-US" dirty="0">
+                <a:cs typeface="+mn-lt"/>
+              </a:rPr>
+              <a:t/>
+            </a:r>
             <a:br>
               <a:rPr lang="en-US" dirty="0">
                 <a:cs typeface="+mn-lt"/>
@@ -4317,6 +4486,12 @@
               <a:rPr lang="en-US" dirty="0"/>
               <a:t> classes.</a:t>
             </a:r>
+            <a:r>
+              <a:rPr lang="en-US" dirty="0">
+                <a:cs typeface="+mn-lt"/>
+              </a:rPr>
+              <a:t/>
+            </a:r>
             <a:br>
               <a:rPr lang="en-US" dirty="0">
                 <a:cs typeface="+mn-lt"/>
@@ -4382,6 +4557,12 @@
               <a:rPr lang="en-US" dirty="0"/>
               <a:t>.</a:t>
             </a:r>
+            <a:r>
+              <a:rPr lang="en-US" dirty="0">
+                <a:cs typeface="+mn-lt"/>
+              </a:rPr>
+              <a:t/>
+            </a:r>
             <a:br>
               <a:rPr lang="en-US" dirty="0">
                 <a:cs typeface="+mn-lt"/>
@@ -4487,6 +4668,12 @@
               <a:rPr lang="en-US" dirty="0"/>
               <a:t>.</a:t>
             </a:r>
+            <a:r>
+              <a:rPr lang="en-US" dirty="0">
+                <a:cs typeface="+mn-lt"/>
+              </a:rPr>
+              <a:t/>
+            </a:r>
             <a:br>
               <a:rPr lang="en-US" dirty="0">
                 <a:cs typeface="+mn-lt"/>
@@ -4531,6 +4718,12 @@
             <a:r>
               <a:rPr lang="en-US" dirty="0"/>
               <a:t>.</a:t>
+            </a:r>
+            <a:r>
+              <a:rPr lang="en-US" dirty="0">
+                <a:cs typeface="+mn-lt"/>
+              </a:rPr>
+              <a:t/>
             </a:r>
             <a:br>
               <a:rPr lang="en-US" dirty="0">
@@ -4584,6 +4777,7 @@
           <a:p>
             <a:fld id="{F7021451-1387-4CA6-816F-3879F97B5CBC}" type="slidenum">
               <a:rPr lang="en-US"/>
+              <a:pPr/>
               <a:t>7</a:t>
             </a:fld>
             <a:endParaRPr lang="en-US"/>
@@ -4593,7 +4787,7 @@
     </p:spTree>
     <p:extLst>
       <p:ext uri="{BB962C8B-B14F-4D97-AF65-F5344CB8AC3E}">
-        <p14:creationId xmlns:p14="http://schemas.microsoft.com/office/powerpoint/2010/main" val="1024086991"/>
+        <p14:creationId xmlns:p14="http://schemas.microsoft.com/office/powerpoint/2010/main" xmlns="" val="1024086991"/>
       </p:ext>
     </p:extLst>
   </p:cSld>
@@ -4649,8 +4843,64 @@
           <a:p>
             <a:r>
               <a:rPr lang="en-US" dirty="0"/>
-              <a:t>B (Aziz). Chiffre clé : F1 0,92 contre 0,56. Le gain vient du rappel (0,89 contre 0,39) sans exploser le nombre d'alertes (1,25 par ordonnance).</a:t>
-            </a:r>
+              <a:t>B (Aziz). Chiffre clé : F1 0,92 contre 0,56. Le gain vient du rappel (0,89 contre 0,39) sans exploser le nombre d'alertes (1,25 par </a:t>
+            </a:r>
+            <a:r>
+              <a:rPr lang="en-US" dirty="0" err="1"/>
+              <a:t>ordonnance</a:t>
+            </a:r>
+            <a:r>
+              <a:rPr lang="en-US" dirty="0" smtClean="0"/>
+              <a:t>).</a:t>
+            </a:r>
+          </a:p>
+          <a:p>
+            <a:endParaRPr lang="en-US" dirty="0" smtClean="0"/>
+          </a:p>
+          <a:p>
+            <a:pPr>
+              <a:buFont typeface="Wingdings"/>
+              <a:buChar char="Ø"/>
+            </a:pPr>
+            <a:r>
+              <a:rPr lang="fr-FR" dirty="0" smtClean="0"/>
+              <a:t>Sur les 54 interactions attendues, le système hybride en trouve 48 et produit deux fausses alertes. Il atteint une précision de 0,96, un rappel de 0,89 et un F1 de 0,92.&gt; La configuration concise produit en moyenne 1,25 alerte par ordonnance. C'est le compromis retenu entre couverture et fatigue d'alerte.&gt;</a:t>
+            </a:r>
+          </a:p>
+          <a:p>
+            <a:pPr>
+              <a:buFont typeface="Wingdings"/>
+              <a:buChar char="Ø"/>
+            </a:pPr>
+            <a:endParaRPr lang="fr-FR" dirty="0" smtClean="0"/>
+          </a:p>
+          <a:p>
+            <a:pPr>
+              <a:buFont typeface="Wingdings"/>
+              <a:buChar char="Ø"/>
+            </a:pPr>
+            <a:r>
+              <a:rPr lang="fr-FR" dirty="0" smtClean="0"/>
+              <a:t> La référence par liste de paires a une précision de 1,00, mais un rappel de seulement 0,39 et un F1 de 0,56. Elle ne se trompe pas sur les paires qu'elle connaît, mais elle rate environ six interactions sur dix parce qu'elle ne généralise pas aux classes de médicaments.</a:t>
+            </a:r>
+          </a:p>
+          <a:p>
+            <a:pPr>
+              <a:buFont typeface="Wingdings"/>
+              <a:buChar char="Ø"/>
+            </a:pPr>
+            <a:endParaRPr lang="fr-FR" dirty="0" smtClean="0"/>
+          </a:p>
+          <a:p>
+            <a:pPr>
+              <a:buFont typeface="Wingdings"/>
+              <a:buChar char="Ø"/>
+            </a:pPr>
+            <a:r>
+              <a:rPr lang="fr-FR" dirty="0" smtClean="0"/>
+              <a:t> L'ablation aide à comprendre d'où vient ce résultat. </a:t>
+            </a:r>
+            <a:endParaRPr lang="en-US" dirty="0"/>
           </a:p>
         </p:txBody>
       </p:sp>
@@ -4671,6 +4921,7 @@
           <a:p>
             <a:fld id="{F7021451-1387-4CA6-816F-3879F97B5CBC}" type="slidenum">
               <a:rPr lang="en-US"/>
+              <a:pPr/>
               <a:t>8</a:t>
             </a:fld>
             <a:endParaRPr lang="en-US"/>
@@ -4680,7 +4931,7 @@
     </p:spTree>
     <p:extLst>
       <p:ext uri="{BB962C8B-B14F-4D97-AF65-F5344CB8AC3E}">
-        <p14:creationId xmlns:p14="http://schemas.microsoft.com/office/powerpoint/2010/main" val="1024086991"/>
+        <p14:creationId xmlns:p14="http://schemas.microsoft.com/office/powerpoint/2010/main" xmlns="" val="1024086991"/>
       </p:ext>
     </p:extLst>
   </p:cSld>
@@ -4735,9 +4986,48 @@
           <a:lstStyle/>
           <a:p>
             <a:r>
-              <a:rPr lang="en-US" dirty="0"/>
-              <a:t>B (Aziz). Les règles expertes portent l'essentiel (graphe seul : F1 0,31). La règle G1 n'est utile qu'avec le filtre marge étroite : c'est l'association du mécanisme (graphe) et de la connaissance clinique. Les règles d'Aziz apportent 11 vraies alertes.</a:t>
-            </a:r>
+              <a:rPr lang="fr-FR" dirty="0" smtClean="0"/>
+              <a:t>L'hybride complet atteint un F1 de 0,92. Quand nous retirons le filtre de marge thérapeutique étroite, le F1 descend à 0,81. Sans les règles R19 à R24, il tombe à 0,80. Sans la table ATC, il tombe à 0,71.</a:t>
+            </a:r>
+          </a:p>
+          <a:p>
+            <a:endParaRPr lang="fr-FR" dirty="0" smtClean="0"/>
+          </a:p>
+          <a:p>
+            <a:pPr>
+              <a:buFont typeface="Wingdings"/>
+              <a:buChar char="Ø"/>
+            </a:pPr>
+            <a:r>
+              <a:rPr lang="fr-FR" dirty="0" smtClean="0"/>
+              <a:t>Ces résultats montrent que la table complémentaire et les règles ajoutées lors de la fusion apportent une couverture importante face aux manques du graphe.</a:t>
+            </a:r>
+          </a:p>
+          <a:p>
+            <a:pPr>
+              <a:buFont typeface="Wingdings"/>
+              <a:buNone/>
+            </a:pPr>
+            <a:endParaRPr lang="fr-FR" dirty="0" smtClean="0"/>
+          </a:p>
+          <a:p>
+            <a:pPr>
+              <a:buFont typeface="Wingdings"/>
+              <a:buChar char="Ø"/>
+            </a:pPr>
+            <a:r>
+              <a:rPr lang="fr-FR" dirty="0" smtClean="0"/>
+              <a:t>Un graphe seul, avec seulement G1 à G3, atteint 0,31. Et si nous supprimons le filtre </a:t>
+            </a:r>
+            <a:r>
+              <a:rPr lang="fr-FR" dirty="0" err="1" smtClean="0"/>
+              <a:t>anti-fatigue</a:t>
+            </a:r>
+            <a:r>
+              <a:rPr lang="fr-FR" dirty="0" smtClean="0"/>
+              <a:t>, le rappel monte à 0,94, mais le système produit 70 fausses alertes sur 40 ordonnances. Le filtre améliore donc directement l'utilité de la sortie.</a:t>
+            </a:r>
+            <a:endParaRPr lang="en-US" dirty="0"/>
           </a:p>
         </p:txBody>
       </p:sp>
@@ -4758,6 +5048,7 @@
           <a:p>
             <a:fld id="{F7021451-1387-4CA6-816F-3879F97B5CBC}" type="slidenum">
               <a:rPr lang="en-US"/>
+              <a:pPr/>
               <a:t>9</a:t>
             </a:fld>
             <a:endParaRPr lang="en-US"/>
@@ -4767,7 +5058,7 @@
     </p:spTree>
     <p:extLst>
       <p:ext uri="{BB962C8B-B14F-4D97-AF65-F5344CB8AC3E}">
-        <p14:creationId xmlns:p14="http://schemas.microsoft.com/office/powerpoint/2010/main" val="1024086991"/>
+        <p14:creationId xmlns:p14="http://schemas.microsoft.com/office/powerpoint/2010/main" xmlns="" val="1024086991"/>
       </p:ext>
     </p:extLst>
   </p:cSld>
@@ -5794,14 +6085,14 @@
           <p:nvPr>
             <p:extLst>
               <p:ext uri="{D42A27DB-BD31-4B8C-83A1-F6EECF244321}">
-                <p14:modId xmlns:p14="http://schemas.microsoft.com/office/powerpoint/2010/main" val="1579011935"/>
+                <p14:modId xmlns:p14="http://schemas.microsoft.com/office/powerpoint/2010/main" xmlns="" val="1579011935"/>
               </p:ext>
             </p:extLst>
           </p:nvPr>
         </p:nvGraphicFramePr>
         <p:xfrm>
           <a:off x="825500" y="2368550"/>
-          <a:ext cx="7607300" cy="1317724"/>
+          <a:ext cx="7607300" cy="1317723"/>
         </p:xfrm>
         <a:graphic>
           <a:graphicData uri="http://schemas.openxmlformats.org/drawingml/2006/table">
@@ -5811,21 +6102,21 @@
                 <a:gridCol w="3042920">
                   <a:extLst>
                     <a:ext uri="{9D8B030D-6E8A-4147-A177-3AD203B41FA5}">
-                      <a16:colId xmlns:a16="http://schemas.microsoft.com/office/drawing/2014/main" val="20000"/>
+                      <a16:colId xmlns:a16="http://schemas.microsoft.com/office/drawing/2014/main" xmlns="" val="20000"/>
                     </a:ext>
                   </a:extLst>
                 </a:gridCol>
                 <a:gridCol w="2282190">
                   <a:extLst>
                     <a:ext uri="{9D8B030D-6E8A-4147-A177-3AD203B41FA5}">
-                      <a16:colId xmlns:a16="http://schemas.microsoft.com/office/drawing/2014/main" val="20001"/>
+                      <a16:colId xmlns:a16="http://schemas.microsoft.com/office/drawing/2014/main" xmlns="" val="20001"/>
                     </a:ext>
                   </a:extLst>
                 </a:gridCol>
                 <a:gridCol w="2282190">
                   <a:extLst>
                     <a:ext uri="{9D8B030D-6E8A-4147-A177-3AD203B41FA5}">
-                      <a16:colId xmlns:a16="http://schemas.microsoft.com/office/drawing/2014/main" val="20002"/>
+                      <a16:colId xmlns:a16="http://schemas.microsoft.com/office/drawing/2014/main" xmlns="" val="20002"/>
                     </a:ext>
                   </a:extLst>
                 </a:gridCol>
@@ -6046,7 +6337,7 @@
                 </a:tc>
                 <a:extLst>
                   <a:ext uri="{0D108BD9-81ED-4DB2-BD59-A6C34878D82A}">
-                    <a16:rowId xmlns:a16="http://schemas.microsoft.com/office/drawing/2014/main" val="10000"/>
+                    <a16:rowId xmlns:a16="http://schemas.microsoft.com/office/drawing/2014/main" xmlns="" val="10000"/>
                   </a:ext>
                 </a:extLst>
               </a:tr>
@@ -6257,7 +6548,7 @@
                 </a:tc>
                 <a:extLst>
                   <a:ext uri="{0D108BD9-81ED-4DB2-BD59-A6C34878D82A}">
-                    <a16:rowId xmlns:a16="http://schemas.microsoft.com/office/drawing/2014/main" val="10001"/>
+                    <a16:rowId xmlns:a16="http://schemas.microsoft.com/office/drawing/2014/main" xmlns="" val="10001"/>
                   </a:ext>
                 </a:extLst>
               </a:tr>
@@ -6468,7 +6759,7 @@
                 </a:tc>
                 <a:extLst>
                   <a:ext uri="{0D108BD9-81ED-4DB2-BD59-A6C34878D82A}">
-                    <a16:rowId xmlns:a16="http://schemas.microsoft.com/office/drawing/2014/main" val="10002"/>
+                    <a16:rowId xmlns:a16="http://schemas.microsoft.com/office/drawing/2014/main" xmlns="" val="10002"/>
                   </a:ext>
                 </a:extLst>
               </a:tr>
@@ -8739,7 +9030,7 @@
                 <a:hlinkClick r:id="rId3">
                   <a:extLst>
                     <a:ext uri="{A12FA001-AC4F-418D-AE19-62706E023703}">
-                      <ahyp:hlinkClr xmlns:ahyp="http://schemas.microsoft.com/office/drawing/2018/hyperlinkcolor" val="tx"/>
+                      <ahyp:hlinkClr xmlns:ahyp="http://schemas.microsoft.com/office/drawing/2018/hyperlinkcolor" xmlns="" val="tx"/>
                     </a:ext>
                   </a:extLst>
                 </a:hlinkClick>
@@ -11199,7 +11490,7 @@
           <p:nvPr>
             <p:extLst>
               <p:ext uri="{D42A27DB-BD31-4B8C-83A1-F6EECF244321}">
-                <p14:modId xmlns:p14="http://schemas.microsoft.com/office/powerpoint/2010/main" val="1579011935"/>
+                <p14:modId xmlns:p14="http://schemas.microsoft.com/office/powerpoint/2010/main" xmlns="" val="1579011935"/>
               </p:ext>
             </p:extLst>
           </p:nvPr>
@@ -11216,21 +11507,21 @@
                 <a:gridCol w="2532888">
                   <a:extLst>
                     <a:ext uri="{9D8B030D-6E8A-4147-A177-3AD203B41FA5}">
-                      <a16:colId xmlns:a16="http://schemas.microsoft.com/office/drawing/2014/main" val="20000"/>
+                      <a16:colId xmlns:a16="http://schemas.microsoft.com/office/drawing/2014/main" xmlns="" val="20000"/>
                     </a:ext>
                   </a:extLst>
                 </a:gridCol>
                 <a:gridCol w="4854702">
                   <a:extLst>
                     <a:ext uri="{9D8B030D-6E8A-4147-A177-3AD203B41FA5}">
-                      <a16:colId xmlns:a16="http://schemas.microsoft.com/office/drawing/2014/main" val="20001"/>
+                      <a16:colId xmlns:a16="http://schemas.microsoft.com/office/drawing/2014/main" xmlns="" val="20001"/>
                     </a:ext>
                   </a:extLst>
                 </a:gridCol>
                 <a:gridCol w="3166110">
                   <a:extLst>
                     <a:ext uri="{9D8B030D-6E8A-4147-A177-3AD203B41FA5}">
-                      <a16:colId xmlns:a16="http://schemas.microsoft.com/office/drawing/2014/main" val="20002"/>
+                      <a16:colId xmlns:a16="http://schemas.microsoft.com/office/drawing/2014/main" xmlns="" val="20002"/>
                     </a:ext>
                   </a:extLst>
                 </a:gridCol>
@@ -11451,7 +11742,7 @@
                 </a:tc>
                 <a:extLst>
                   <a:ext uri="{0D108BD9-81ED-4DB2-BD59-A6C34878D82A}">
-                    <a16:rowId xmlns:a16="http://schemas.microsoft.com/office/drawing/2014/main" val="10000"/>
+                    <a16:rowId xmlns:a16="http://schemas.microsoft.com/office/drawing/2014/main" xmlns="" val="10000"/>
                   </a:ext>
                 </a:extLst>
               </a:tr>
@@ -11662,7 +11953,7 @@
                 </a:tc>
                 <a:extLst>
                   <a:ext uri="{0D108BD9-81ED-4DB2-BD59-A6C34878D82A}">
-                    <a16:rowId xmlns:a16="http://schemas.microsoft.com/office/drawing/2014/main" val="10001"/>
+                    <a16:rowId xmlns:a16="http://schemas.microsoft.com/office/drawing/2014/main" xmlns="" val="10001"/>
                   </a:ext>
                 </a:extLst>
               </a:tr>
@@ -11873,7 +12164,7 @@
                 </a:tc>
                 <a:extLst>
                   <a:ext uri="{0D108BD9-81ED-4DB2-BD59-A6C34878D82A}">
-                    <a16:rowId xmlns:a16="http://schemas.microsoft.com/office/drawing/2014/main" val="10002"/>
+                    <a16:rowId xmlns:a16="http://schemas.microsoft.com/office/drawing/2014/main" xmlns="" val="10002"/>
                   </a:ext>
                 </a:extLst>
               </a:tr>
@@ -12084,7 +12375,7 @@
                 </a:tc>
                 <a:extLst>
                   <a:ext uri="{0D108BD9-81ED-4DB2-BD59-A6C34878D82A}">
-                    <a16:rowId xmlns:a16="http://schemas.microsoft.com/office/drawing/2014/main" val="10003"/>
+                    <a16:rowId xmlns:a16="http://schemas.microsoft.com/office/drawing/2014/main" xmlns="" val="10003"/>
                   </a:ext>
                 </a:extLst>
               </a:tr>
@@ -12295,7 +12586,7 @@
                 </a:tc>
                 <a:extLst>
                   <a:ext uri="{0D108BD9-81ED-4DB2-BD59-A6C34878D82A}">
-                    <a16:rowId xmlns:a16="http://schemas.microsoft.com/office/drawing/2014/main" val="10004"/>
+                    <a16:rowId xmlns:a16="http://schemas.microsoft.com/office/drawing/2014/main" xmlns="" val="10004"/>
                   </a:ext>
                 </a:extLst>
               </a:tr>
@@ -15418,7 +15709,7 @@
     </a:clrScheme>
     <a:fontScheme name="Office">
       <a:majorFont>
-        <a:latin typeface="Calibri Light" panose="020F0302020204030204"/>
+        <a:latin typeface="Calibri Light"/>
         <a:ea typeface=""/>
         <a:cs typeface=""/>
         <a:font script="Jpan" typeface="游ゴシック Light"/>
@@ -15470,7 +15761,7 @@
         <a:font script="Tfng" typeface="Ebrima"/>
       </a:majorFont>
       <a:minorFont>
-        <a:latin typeface="Calibri" panose="020F0502020204030204"/>
+        <a:latin typeface="Calibri"/>
         <a:ea typeface=""/>
         <a:cs typeface=""/>
         <a:font script="Jpan" typeface="游ゴシック"/>
@@ -15664,7 +15955,7 @@
   <a:extraClrSchemeLst/>
   <a:extLst>
     <a:ext uri="{05A4C25C-085E-4340-85A3-A5531E510DB2}">
-      <thm15:themeFamily xmlns:thm15="http://schemas.microsoft.com/office/thememl/2012/main" name="Office Theme" id="{62F939B6-93AF-4DB8-9C6B-D6C7DFDC589F}" vid="{4A3C46E8-61CC-4603-A589-7422A47A8E4A}"/>
+      <thm15:themeFamily xmlns:thm15="http://schemas.microsoft.com/office/thememl/2012/main" xmlns="" name="Office Theme" id="{62F939B6-93AF-4DB8-9C6B-D6C7DFDC589F}" vid="{4A3C46E8-61CC-4603-A589-7422A47A8E4A}"/>
     </a:ext>
   </a:extLst>
 </a:theme>
